--- a/docs/QuizMaster_Presentation.pptx
+++ b/docs/QuizMaster_Presentation.pptx
@@ -5,17 +5,13 @@
     <p:sldMasterId id="2147483648" r:id="rId1"/>
   </p:sldMasterIdLst>
   <p:sldIdLst>
-    <p:sldId id="256" r:id="rId7"/>
-    <p:sldId id="257" r:id="rId8"/>
-    <p:sldId id="258" r:id="rId9"/>
-    <p:sldId id="259" r:id="rId10"/>
-    <p:sldId id="260" r:id="rId11"/>
-    <p:sldId id="261" r:id="rId12"/>
-    <p:sldId id="262" r:id="rId13"/>
-    <p:sldId id="263" r:id="rId14"/>
-    <p:sldId id="264" r:id="rId15"/>
+    <p:sldId id="256" r:id="rId2"/>
+    <p:sldId id="257" r:id="rId3"/>
+    <p:sldId id="258" r:id="rId4"/>
+    <p:sldId id="260" r:id="rId5"/>
+    <p:sldId id="262" r:id="rId6"/>
   </p:sldIdLst>
-  <p:sldSz cx="12191695" cy="6858000" type="screen4x3"/>
+  <p:sldSz cx="12192000" cy="6858000"/>
   <p:notesSz cx="6858000" cy="9144000"/>
   <p:defaultTextStyle>
     <a:defPPr>
@@ -112,6 +108,22 @@
       </a:defRPr>
     </a:lvl9pPr>
   </p:defaultTextStyle>
+  <p:extLst>
+    <p:ext uri="{EFAFB233-063F-42B5-8137-9DF3F51BA10A}">
+      <p15:sldGuideLst xmlns:p15="http://schemas.microsoft.com/office/powerpoint/2012/main">
+        <p15:guide id="1" orient="horz" pos="2160">
+          <p15:clr>
+            <a:srgbClr val="A4A3A4"/>
+          </p15:clr>
+        </p15:guide>
+        <p15:guide id="2" pos="2880">
+          <p15:clr>
+            <a:srgbClr val="A4A3A4"/>
+          </p15:clr>
+        </p15:guide>
+      </p15:sldGuideLst>
+    </p:ext>
+  </p:extLst>
 </p:presentation>
 </file>
 
@@ -153,10 +165,9 @@
           <a:lstStyle/>
           <a:p>
             <a:r>
-              <a:rPr lang="en-US" smtClean="0"/>
+              <a:rPr lang="en-US"/>
               <a:t>Click to edit Master title style</a:t>
             </a:r>
-            <a:endParaRPr lang="en-US"/>
           </a:p>
         </p:txBody>
       </p:sp>
@@ -272,10 +283,9 @@
           </a:lstStyle>
           <a:p>
             <a:r>
-              <a:rPr lang="en-US" smtClean="0"/>
+              <a:rPr lang="en-US"/>
               <a:t>Click to edit Master subtitle style</a:t>
             </a:r>
-            <a:endParaRPr lang="en-US"/>
           </a:p>
         </p:txBody>
       </p:sp>
@@ -296,7 +306,7 @@
           <a:p>
             <a:fld id="{5BCAD085-E8A6-8845-BD4E-CB4CCA059FC4}" type="datetimeFigureOut">
               <a:rPr lang="en-US" smtClean="0"/>
-              <a:t>1/27/13</a:t>
+              <a:t>5/30/2026</a:t>
             </a:fld>
             <a:endParaRPr lang="en-US"/>
           </a:p>
@@ -390,10 +400,9 @@
           <a:lstStyle/>
           <a:p>
             <a:r>
-              <a:rPr lang="en-US" smtClean="0"/>
+              <a:rPr lang="en-US"/>
               <a:t>Click to edit Master title style</a:t>
             </a:r>
-            <a:endParaRPr lang="en-US"/>
           </a:p>
         </p:txBody>
       </p:sp>
@@ -414,38 +423,37 @@
           <a:p>
             <a:pPr lvl="0"/>
             <a:r>
-              <a:rPr lang="en-US" smtClean="0"/>
+              <a:rPr lang="en-US"/>
               <a:t>Click to edit Master text styles</a:t>
             </a:r>
           </a:p>
           <a:p>
             <a:pPr lvl="1"/>
             <a:r>
-              <a:rPr lang="en-US" smtClean="0"/>
+              <a:rPr lang="en-US"/>
               <a:t>Second level</a:t>
             </a:r>
           </a:p>
           <a:p>
             <a:pPr lvl="2"/>
             <a:r>
-              <a:rPr lang="en-US" smtClean="0"/>
+              <a:rPr lang="en-US"/>
               <a:t>Third level</a:t>
             </a:r>
           </a:p>
           <a:p>
             <a:pPr lvl="3"/>
             <a:r>
-              <a:rPr lang="en-US" smtClean="0"/>
+              <a:rPr lang="en-US"/>
               <a:t>Fourth level</a:t>
             </a:r>
           </a:p>
           <a:p>
             <a:pPr lvl="4"/>
             <a:r>
-              <a:rPr lang="en-US" smtClean="0"/>
+              <a:rPr lang="en-US"/>
               <a:t>Fifth level</a:t>
             </a:r>
-            <a:endParaRPr lang="en-US"/>
           </a:p>
         </p:txBody>
       </p:sp>
@@ -466,7 +474,7 @@
           <a:p>
             <a:fld id="{5BCAD085-E8A6-8845-BD4E-CB4CCA059FC4}" type="datetimeFigureOut">
               <a:rPr lang="en-US" smtClean="0"/>
-              <a:t>1/27/13</a:t>
+              <a:t>5/30/2026</a:t>
             </a:fld>
             <a:endParaRPr lang="en-US"/>
           </a:p>
@@ -565,10 +573,9 @@
           <a:lstStyle/>
           <a:p>
             <a:r>
-              <a:rPr lang="en-US" smtClean="0"/>
+              <a:rPr lang="en-US"/>
               <a:t>Click to edit Master title style</a:t>
             </a:r>
-            <a:endParaRPr lang="en-US"/>
           </a:p>
         </p:txBody>
       </p:sp>
@@ -594,38 +601,37 @@
           <a:p>
             <a:pPr lvl="0"/>
             <a:r>
-              <a:rPr lang="en-US" smtClean="0"/>
+              <a:rPr lang="en-US"/>
               <a:t>Click to edit Master text styles</a:t>
             </a:r>
           </a:p>
           <a:p>
             <a:pPr lvl="1"/>
             <a:r>
-              <a:rPr lang="en-US" smtClean="0"/>
+              <a:rPr lang="en-US"/>
               <a:t>Second level</a:t>
             </a:r>
           </a:p>
           <a:p>
             <a:pPr lvl="2"/>
             <a:r>
-              <a:rPr lang="en-US" smtClean="0"/>
+              <a:rPr lang="en-US"/>
               <a:t>Third level</a:t>
             </a:r>
           </a:p>
           <a:p>
             <a:pPr lvl="3"/>
             <a:r>
-              <a:rPr lang="en-US" smtClean="0"/>
+              <a:rPr lang="en-US"/>
               <a:t>Fourth level</a:t>
             </a:r>
           </a:p>
           <a:p>
             <a:pPr lvl="4"/>
             <a:r>
-              <a:rPr lang="en-US" smtClean="0"/>
+              <a:rPr lang="en-US"/>
               <a:t>Fifth level</a:t>
             </a:r>
-            <a:endParaRPr lang="en-US"/>
           </a:p>
         </p:txBody>
       </p:sp>
@@ -646,7 +652,7 @@
           <a:p>
             <a:fld id="{5BCAD085-E8A6-8845-BD4E-CB4CCA059FC4}" type="datetimeFigureOut">
               <a:rPr lang="en-US" smtClean="0"/>
-              <a:t>1/27/13</a:t>
+              <a:t>5/30/2026</a:t>
             </a:fld>
             <a:endParaRPr lang="en-US"/>
           </a:p>
@@ -740,10 +746,9 @@
           <a:lstStyle/>
           <a:p>
             <a:r>
-              <a:rPr lang="en-US" smtClean="0"/>
+              <a:rPr lang="en-US"/>
               <a:t>Click to edit Master title style</a:t>
             </a:r>
-            <a:endParaRPr lang="en-US"/>
           </a:p>
         </p:txBody>
       </p:sp>
@@ -764,38 +769,37 @@
           <a:p>
             <a:pPr lvl="0"/>
             <a:r>
-              <a:rPr lang="en-US" smtClean="0"/>
+              <a:rPr lang="en-US"/>
               <a:t>Click to edit Master text styles</a:t>
             </a:r>
           </a:p>
           <a:p>
             <a:pPr lvl="1"/>
             <a:r>
-              <a:rPr lang="en-US" smtClean="0"/>
+              <a:rPr lang="en-US"/>
               <a:t>Second level</a:t>
             </a:r>
           </a:p>
           <a:p>
             <a:pPr lvl="2"/>
             <a:r>
-              <a:rPr lang="en-US" smtClean="0"/>
+              <a:rPr lang="en-US"/>
               <a:t>Third level</a:t>
             </a:r>
           </a:p>
           <a:p>
             <a:pPr lvl="3"/>
             <a:r>
-              <a:rPr lang="en-US" smtClean="0"/>
+              <a:rPr lang="en-US"/>
               <a:t>Fourth level</a:t>
             </a:r>
           </a:p>
           <a:p>
             <a:pPr lvl="4"/>
             <a:r>
-              <a:rPr lang="en-US" smtClean="0"/>
+              <a:rPr lang="en-US"/>
               <a:t>Fifth level</a:t>
             </a:r>
-            <a:endParaRPr lang="en-US"/>
           </a:p>
         </p:txBody>
       </p:sp>
@@ -816,7 +820,7 @@
           <a:p>
             <a:fld id="{5BCAD085-E8A6-8845-BD4E-CB4CCA059FC4}" type="datetimeFigureOut">
               <a:rPr lang="en-US" smtClean="0"/>
-              <a:t>1/27/13</a:t>
+              <a:t>5/30/2026</a:t>
             </a:fld>
             <a:endParaRPr lang="en-US"/>
           </a:p>
@@ -919,10 +923,9 @@
           </a:lstStyle>
           <a:p>
             <a:r>
-              <a:rPr lang="en-US" smtClean="0"/>
+              <a:rPr lang="en-US"/>
               <a:t>Click to edit Master title style</a:t>
             </a:r>
-            <a:endParaRPr lang="en-US"/>
           </a:p>
         </p:txBody>
       </p:sp>
@@ -1039,7 +1042,7 @@
           <a:p>
             <a:pPr lvl="0"/>
             <a:r>
-              <a:rPr lang="en-US" smtClean="0"/>
+              <a:rPr lang="en-US"/>
               <a:t>Click to edit Master text styles</a:t>
             </a:r>
           </a:p>
@@ -1062,7 +1065,7 @@
           <a:p>
             <a:fld id="{5BCAD085-E8A6-8845-BD4E-CB4CCA059FC4}" type="datetimeFigureOut">
               <a:rPr lang="en-US" smtClean="0"/>
-              <a:t>1/27/13</a:t>
+              <a:t>5/30/2026</a:t>
             </a:fld>
             <a:endParaRPr lang="en-US"/>
           </a:p>
@@ -1156,10 +1159,9 @@
           <a:lstStyle/>
           <a:p>
             <a:r>
-              <a:rPr lang="en-US" smtClean="0"/>
+              <a:rPr lang="en-US"/>
               <a:t>Click to edit Master title style</a:t>
             </a:r>
-            <a:endParaRPr lang="en-US"/>
           </a:p>
         </p:txBody>
       </p:sp>
@@ -1213,38 +1215,37 @@
           <a:p>
             <a:pPr lvl="0"/>
             <a:r>
-              <a:rPr lang="en-US" smtClean="0"/>
+              <a:rPr lang="en-US"/>
               <a:t>Click to edit Master text styles</a:t>
             </a:r>
           </a:p>
           <a:p>
             <a:pPr lvl="1"/>
             <a:r>
-              <a:rPr lang="en-US" smtClean="0"/>
+              <a:rPr lang="en-US"/>
               <a:t>Second level</a:t>
             </a:r>
           </a:p>
           <a:p>
             <a:pPr lvl="2"/>
             <a:r>
-              <a:rPr lang="en-US" smtClean="0"/>
+              <a:rPr lang="en-US"/>
               <a:t>Third level</a:t>
             </a:r>
           </a:p>
           <a:p>
             <a:pPr lvl="3"/>
             <a:r>
-              <a:rPr lang="en-US" smtClean="0"/>
+              <a:rPr lang="en-US"/>
               <a:t>Fourth level</a:t>
             </a:r>
           </a:p>
           <a:p>
             <a:pPr lvl="4"/>
             <a:r>
-              <a:rPr lang="en-US" smtClean="0"/>
+              <a:rPr lang="en-US"/>
               <a:t>Fifth level</a:t>
             </a:r>
-            <a:endParaRPr lang="en-US"/>
           </a:p>
         </p:txBody>
       </p:sp>
@@ -1298,38 +1299,37 @@
           <a:p>
             <a:pPr lvl="0"/>
             <a:r>
-              <a:rPr lang="en-US" smtClean="0"/>
+              <a:rPr lang="en-US"/>
               <a:t>Click to edit Master text styles</a:t>
             </a:r>
           </a:p>
           <a:p>
             <a:pPr lvl="1"/>
             <a:r>
-              <a:rPr lang="en-US" smtClean="0"/>
+              <a:rPr lang="en-US"/>
               <a:t>Second level</a:t>
             </a:r>
           </a:p>
           <a:p>
             <a:pPr lvl="2"/>
             <a:r>
-              <a:rPr lang="en-US" smtClean="0"/>
+              <a:rPr lang="en-US"/>
               <a:t>Third level</a:t>
             </a:r>
           </a:p>
           <a:p>
             <a:pPr lvl="3"/>
             <a:r>
-              <a:rPr lang="en-US" smtClean="0"/>
+              <a:rPr lang="en-US"/>
               <a:t>Fourth level</a:t>
             </a:r>
           </a:p>
           <a:p>
             <a:pPr lvl="4"/>
             <a:r>
-              <a:rPr lang="en-US" smtClean="0"/>
+              <a:rPr lang="en-US"/>
               <a:t>Fifth level</a:t>
             </a:r>
-            <a:endParaRPr lang="en-US"/>
           </a:p>
         </p:txBody>
       </p:sp>
@@ -1350,7 +1350,7 @@
           <a:p>
             <a:fld id="{5BCAD085-E8A6-8845-BD4E-CB4CCA059FC4}" type="datetimeFigureOut">
               <a:rPr lang="en-US" smtClean="0"/>
-              <a:t>1/27/13</a:t>
+              <a:t>5/30/2026</a:t>
             </a:fld>
             <a:endParaRPr lang="en-US"/>
           </a:p>
@@ -1448,10 +1448,9 @@
           </a:lstStyle>
           <a:p>
             <a:r>
-              <a:rPr lang="en-US" smtClean="0"/>
+              <a:rPr lang="en-US"/>
               <a:t>Click to edit Master title style</a:t>
             </a:r>
-            <a:endParaRPr lang="en-US"/>
           </a:p>
         </p:txBody>
       </p:sp>
@@ -1514,7 +1513,7 @@
           <a:p>
             <a:pPr lvl="0"/>
             <a:r>
-              <a:rPr lang="en-US" smtClean="0"/>
+              <a:rPr lang="en-US"/>
               <a:t>Click to edit Master text styles</a:t>
             </a:r>
           </a:p>
@@ -1570,38 +1569,37 @@
           <a:p>
             <a:pPr lvl="0"/>
             <a:r>
-              <a:rPr lang="en-US" smtClean="0"/>
+              <a:rPr lang="en-US"/>
               <a:t>Click to edit Master text styles</a:t>
             </a:r>
           </a:p>
           <a:p>
             <a:pPr lvl="1"/>
             <a:r>
-              <a:rPr lang="en-US" smtClean="0"/>
+              <a:rPr lang="en-US"/>
               <a:t>Second level</a:t>
             </a:r>
           </a:p>
           <a:p>
             <a:pPr lvl="2"/>
             <a:r>
-              <a:rPr lang="en-US" smtClean="0"/>
+              <a:rPr lang="en-US"/>
               <a:t>Third level</a:t>
             </a:r>
           </a:p>
           <a:p>
             <a:pPr lvl="3"/>
             <a:r>
-              <a:rPr lang="en-US" smtClean="0"/>
+              <a:rPr lang="en-US"/>
               <a:t>Fourth level</a:t>
             </a:r>
           </a:p>
           <a:p>
             <a:pPr lvl="4"/>
             <a:r>
-              <a:rPr lang="en-US" smtClean="0"/>
+              <a:rPr lang="en-US"/>
               <a:t>Fifth level</a:t>
             </a:r>
-            <a:endParaRPr lang="en-US"/>
           </a:p>
         </p:txBody>
       </p:sp>
@@ -1664,7 +1662,7 @@
           <a:p>
             <a:pPr lvl="0"/>
             <a:r>
-              <a:rPr lang="en-US" smtClean="0"/>
+              <a:rPr lang="en-US"/>
               <a:t>Click to edit Master text styles</a:t>
             </a:r>
           </a:p>
@@ -1720,38 +1718,37 @@
           <a:p>
             <a:pPr lvl="0"/>
             <a:r>
-              <a:rPr lang="en-US" smtClean="0"/>
+              <a:rPr lang="en-US"/>
               <a:t>Click to edit Master text styles</a:t>
             </a:r>
           </a:p>
           <a:p>
             <a:pPr lvl="1"/>
             <a:r>
-              <a:rPr lang="en-US" smtClean="0"/>
+              <a:rPr lang="en-US"/>
               <a:t>Second level</a:t>
             </a:r>
           </a:p>
           <a:p>
             <a:pPr lvl="2"/>
             <a:r>
-              <a:rPr lang="en-US" smtClean="0"/>
+              <a:rPr lang="en-US"/>
               <a:t>Third level</a:t>
             </a:r>
           </a:p>
           <a:p>
             <a:pPr lvl="3"/>
             <a:r>
-              <a:rPr lang="en-US" smtClean="0"/>
+              <a:rPr lang="en-US"/>
               <a:t>Fourth level</a:t>
             </a:r>
           </a:p>
           <a:p>
             <a:pPr lvl="4"/>
             <a:r>
-              <a:rPr lang="en-US" smtClean="0"/>
+              <a:rPr lang="en-US"/>
               <a:t>Fifth level</a:t>
             </a:r>
-            <a:endParaRPr lang="en-US"/>
           </a:p>
         </p:txBody>
       </p:sp>
@@ -1772,7 +1769,7 @@
           <a:p>
             <a:fld id="{5BCAD085-E8A6-8845-BD4E-CB4CCA059FC4}" type="datetimeFigureOut">
               <a:rPr lang="en-US" smtClean="0"/>
-              <a:t>1/27/13</a:t>
+              <a:t>5/30/2026</a:t>
             </a:fld>
             <a:endParaRPr lang="en-US"/>
           </a:p>
@@ -1866,10 +1863,9 @@
           <a:lstStyle/>
           <a:p>
             <a:r>
-              <a:rPr lang="en-US" smtClean="0"/>
+              <a:rPr lang="en-US"/>
               <a:t>Click to edit Master title style</a:t>
             </a:r>
-            <a:endParaRPr lang="en-US"/>
           </a:p>
         </p:txBody>
       </p:sp>
@@ -1890,7 +1886,7 @@
           <a:p>
             <a:fld id="{5BCAD085-E8A6-8845-BD4E-CB4CCA059FC4}" type="datetimeFigureOut">
               <a:rPr lang="en-US" smtClean="0"/>
-              <a:t>1/27/13</a:t>
+              <a:t>5/30/2026</a:t>
             </a:fld>
             <a:endParaRPr lang="en-US"/>
           </a:p>
@@ -1985,7 +1981,7 @@
           <a:p>
             <a:fld id="{5BCAD085-E8A6-8845-BD4E-CB4CCA059FC4}" type="datetimeFigureOut">
               <a:rPr lang="en-US" smtClean="0"/>
-              <a:t>1/27/13</a:t>
+              <a:t>5/30/2026</a:t>
             </a:fld>
             <a:endParaRPr lang="en-US"/>
           </a:p>
@@ -2088,10 +2084,9 @@
           </a:lstStyle>
           <a:p>
             <a:r>
-              <a:rPr lang="en-US" smtClean="0"/>
+              <a:rPr lang="en-US"/>
               <a:t>Click to edit Master title style</a:t>
             </a:r>
-            <a:endParaRPr lang="en-US"/>
           </a:p>
         </p:txBody>
       </p:sp>
@@ -2145,38 +2140,37 @@
           <a:p>
             <a:pPr lvl="0"/>
             <a:r>
-              <a:rPr lang="en-US" smtClean="0"/>
+              <a:rPr lang="en-US"/>
               <a:t>Click to edit Master text styles</a:t>
             </a:r>
           </a:p>
           <a:p>
             <a:pPr lvl="1"/>
             <a:r>
-              <a:rPr lang="en-US" smtClean="0"/>
+              <a:rPr lang="en-US"/>
               <a:t>Second level</a:t>
             </a:r>
           </a:p>
           <a:p>
             <a:pPr lvl="2"/>
             <a:r>
-              <a:rPr lang="en-US" smtClean="0"/>
+              <a:rPr lang="en-US"/>
               <a:t>Third level</a:t>
             </a:r>
           </a:p>
           <a:p>
             <a:pPr lvl="3"/>
             <a:r>
-              <a:rPr lang="en-US" smtClean="0"/>
+              <a:rPr lang="en-US"/>
               <a:t>Fourth level</a:t>
             </a:r>
           </a:p>
           <a:p>
             <a:pPr lvl="4"/>
             <a:r>
-              <a:rPr lang="en-US" smtClean="0"/>
+              <a:rPr lang="en-US"/>
               <a:t>Fifth level</a:t>
             </a:r>
-            <a:endParaRPr lang="en-US"/>
           </a:p>
         </p:txBody>
       </p:sp>
@@ -2239,7 +2233,7 @@
           <a:p>
             <a:pPr lvl="0"/>
             <a:r>
-              <a:rPr lang="en-US" smtClean="0"/>
+              <a:rPr lang="en-US"/>
               <a:t>Click to edit Master text styles</a:t>
             </a:r>
           </a:p>
@@ -2262,7 +2256,7 @@
           <a:p>
             <a:fld id="{5BCAD085-E8A6-8845-BD4E-CB4CCA059FC4}" type="datetimeFigureOut">
               <a:rPr lang="en-US" smtClean="0"/>
-              <a:t>1/27/13</a:t>
+              <a:t>5/30/2026</a:t>
             </a:fld>
             <a:endParaRPr lang="en-US"/>
           </a:p>
@@ -2365,10 +2359,9 @@
           </a:lstStyle>
           <a:p>
             <a:r>
-              <a:rPr lang="en-US" smtClean="0"/>
+              <a:rPr lang="en-US"/>
               <a:t>Click to edit Master title style</a:t>
             </a:r>
-            <a:endParaRPr lang="en-US"/>
           </a:p>
         </p:txBody>
       </p:sp>
@@ -2492,7 +2485,7 @@
           <a:p>
             <a:pPr lvl="0"/>
             <a:r>
-              <a:rPr lang="en-US" smtClean="0"/>
+              <a:rPr lang="en-US"/>
               <a:t>Click to edit Master text styles</a:t>
             </a:r>
           </a:p>
@@ -2515,7 +2508,7 @@
           <a:p>
             <a:fld id="{5BCAD085-E8A6-8845-BD4E-CB4CCA059FC4}" type="datetimeFigureOut">
               <a:rPr lang="en-US" smtClean="0"/>
-              <a:t>1/27/13</a:t>
+              <a:t>5/30/2026</a:t>
             </a:fld>
             <a:endParaRPr lang="en-US"/>
           </a:p>
@@ -2624,10 +2617,9 @@
           <a:lstStyle/>
           <a:p>
             <a:r>
-              <a:rPr lang="en-US" smtClean="0"/>
+              <a:rPr lang="en-US"/>
               <a:t>Click to edit Master title style</a:t>
             </a:r>
-            <a:endParaRPr lang="en-US"/>
           </a:p>
         </p:txBody>
       </p:sp>
@@ -2658,38 +2650,37 @@
           <a:p>
             <a:pPr lvl="0"/>
             <a:r>
-              <a:rPr lang="en-US" smtClean="0"/>
+              <a:rPr lang="en-US"/>
               <a:t>Click to edit Master text styles</a:t>
             </a:r>
           </a:p>
           <a:p>
             <a:pPr lvl="1"/>
             <a:r>
-              <a:rPr lang="en-US" smtClean="0"/>
+              <a:rPr lang="en-US"/>
               <a:t>Second level</a:t>
             </a:r>
           </a:p>
           <a:p>
             <a:pPr lvl="2"/>
             <a:r>
-              <a:rPr lang="en-US" smtClean="0"/>
+              <a:rPr lang="en-US"/>
               <a:t>Third level</a:t>
             </a:r>
           </a:p>
           <a:p>
             <a:pPr lvl="3"/>
             <a:r>
-              <a:rPr lang="en-US" smtClean="0"/>
+              <a:rPr lang="en-US"/>
               <a:t>Fourth level</a:t>
             </a:r>
           </a:p>
           <a:p>
             <a:pPr lvl="4"/>
             <a:r>
-              <a:rPr lang="en-US" smtClean="0"/>
+              <a:rPr lang="en-US"/>
               <a:t>Fifth level</a:t>
             </a:r>
-            <a:endParaRPr lang="en-US"/>
           </a:p>
         </p:txBody>
       </p:sp>
@@ -2728,7 +2719,7 @@
           <a:p>
             <a:fld id="{5BCAD085-E8A6-8845-BD4E-CB4CCA059FC4}" type="datetimeFigureOut">
               <a:rPr lang="en-US" smtClean="0"/>
-              <a:t>1/27/13</a:t>
+              <a:t>5/30/2026</a:t>
             </a:fld>
             <a:endParaRPr lang="en-US"/>
           </a:p>
@@ -3087,7 +3078,7 @@
 </file>
 
 <file path=ppt/slides/slide1.xml><?xml version="1.0" encoding="utf-8"?>
-<p:sld xmlns:a="http://schemas.openxmlformats.org/drawingml/2006/main" xmlns:p="http://schemas.openxmlformats.org/presentationml/2006/main" xmlns:r="http://schemas.openxmlformats.org/officeDocument/2006/relationships">
+<p:sld xmlns:a="http://schemas.openxmlformats.org/drawingml/2006/main" xmlns:r="http://schemas.openxmlformats.org/officeDocument/2006/relationships" xmlns:p="http://schemas.openxmlformats.org/presentationml/2006/main">
   <p:cSld>
     <p:bg>
       <p:bgPr>
@@ -3103,43 +3094,14 @@
         <p:cNvGrpSpPr/>
         <p:nvPr/>
       </p:nvGrpSpPr>
-      <p:grpSpPr/>
-      <p:sp>
-        <p:nvSpPr>
-          <p:cNvPr id="2" name="TextBox 1"/>
-          <p:cNvSpPr txBox="1"/>
-          <p:nvPr/>
-        </p:nvSpPr>
-        <p:spPr>
-          <a:xfrm>
-            <a:off x="457200" y="274320"/>
-            <a:ext cx="2743200" cy="457200"/>
-          </a:xfrm>
-          <a:prstGeom prst="rect">
-            <a:avLst/>
-          </a:prstGeom>
-          <a:noFill/>
-        </p:spPr>
-        <p:txBody>
-          <a:bodyPr wrap="square">
-            <a:spAutoFit/>
-          </a:bodyPr>
-          <a:lstStyle/>
-          <a:p>
-            <a:pPr algn="l">
-              <a:defRPr sz="1600" b="1">
-                <a:solidFill>
-                  <a:srgbClr val="9999BB"/>
-                </a:solidFill>
-                <a:latin typeface="Arial"/>
-              </a:defRPr>
-            </a:pPr>
-            <a:r>
-              <a:t>🎯 QuizMaster</a:t>
-            </a:r>
-          </a:p>
-        </p:txBody>
-      </p:sp>
+      <p:grpSpPr>
+        <a:xfrm>
+          <a:off x="0" y="0"/>
+          <a:ext cx="0" cy="0"/>
+          <a:chOff x="0" y="0"/>
+          <a:chExt cx="0" cy="0"/>
+        </a:xfrm>
+      </p:grpSpPr>
       <p:sp>
         <p:nvSpPr>
           <p:cNvPr id="3" name="TextBox 2"/>
@@ -3218,78 +3180,6 @@
       </p:sp>
       <p:sp>
         <p:nvSpPr>
-          <p:cNvPr id="5" name="TextBox 4"/>
-          <p:cNvSpPr txBox="1"/>
-          <p:nvPr/>
-        </p:nvSpPr>
-        <p:spPr>
-          <a:xfrm>
-            <a:off x="640080" y="4572000"/>
-            <a:ext cx="4572000" cy="365760"/>
-          </a:xfrm>
-          <a:prstGeom prst="rect">
-            <a:avLst/>
-          </a:prstGeom>
-          <a:noFill/>
-        </p:spPr>
-        <p:txBody>
-          <a:bodyPr wrap="square">
-            <a:spAutoFit/>
-          </a:bodyPr>
-          <a:lstStyle/>
-          <a:p>
-            <a:pPr algn="l">
-              <a:defRPr sz="1600" b="0">
-                <a:solidFill>
-                  <a:srgbClr val="9999BB"/>
-                </a:solidFill>
-                <a:latin typeface="Arial"/>
-              </a:defRPr>
-            </a:pPr>
-            <a:r>
-              <a:t>Stack:  React · Express · Socket.IO · SQLite</a:t>
-            </a:r>
-          </a:p>
-        </p:txBody>
-      </p:sp>
-      <p:sp>
-        <p:nvSpPr>
-          <p:cNvPr id="6" name="TextBox 5"/>
-          <p:cNvSpPr txBox="1"/>
-          <p:nvPr/>
-        </p:nvSpPr>
-        <p:spPr>
-          <a:xfrm>
-            <a:off x="640080" y="5029200"/>
-            <a:ext cx="4572000" cy="365760"/>
-          </a:xfrm>
-          <a:prstGeom prst="rect">
-            <a:avLst/>
-          </a:prstGeom>
-          <a:noFill/>
-        </p:spPr>
-        <p:txBody>
-          <a:bodyPr wrap="square">
-            <a:spAutoFit/>
-          </a:bodyPr>
-          <a:lstStyle/>
-          <a:p>
-            <a:pPr algn="l">
-              <a:defRPr sz="1600" b="0">
-                <a:solidFill>
-                  <a:srgbClr val="9999BB"/>
-                </a:solidFill>
-                <a:latin typeface="Arial"/>
-              </a:defRPr>
-            </a:pPr>
-            <a:r>
-              <a:t>Development:  ~5 Days · 39 Source Files</a:t>
-            </a:r>
-          </a:p>
-        </p:txBody>
-      </p:sp>
-      <p:sp>
-        <p:nvSpPr>
           <p:cNvPr id="7" name="TextBox 6"/>
           <p:cNvSpPr txBox="1"/>
           <p:nvPr/>
@@ -3333,7 +3223,7 @@
 </file>
 
 <file path=ppt/slides/slide2.xml><?xml version="1.0" encoding="utf-8"?>
-<p:sld xmlns:a="http://schemas.openxmlformats.org/drawingml/2006/main" xmlns:p="http://schemas.openxmlformats.org/presentationml/2006/main" xmlns:r="http://schemas.openxmlformats.org/officeDocument/2006/relationships">
+<p:sld xmlns:a="http://schemas.openxmlformats.org/drawingml/2006/main" xmlns:r="http://schemas.openxmlformats.org/officeDocument/2006/relationships" xmlns:p="http://schemas.openxmlformats.org/presentationml/2006/main">
   <p:cSld>
     <p:bg>
       <p:bgPr>
@@ -3349,7 +3239,14 @@
         <p:cNvGrpSpPr/>
         <p:nvPr/>
       </p:nvGrpSpPr>
-      <p:grpSpPr/>
+      <p:grpSpPr>
+        <a:xfrm>
+          <a:off x="0" y="0"/>
+          <a:ext cx="0" cy="0"/>
+          <a:chOff x="0" y="0"/>
+          <a:chExt cx="0" cy="0"/>
+        </a:xfrm>
+      </p:grpSpPr>
       <p:sp>
         <p:nvSpPr>
           <p:cNvPr id="2" name="TextBox 1"/>
@@ -3458,7 +3355,7 @@
           </a:fontRef>
         </p:style>
         <p:txBody>
-          <a:bodyPr rtlCol="0" anchor="ctr" wrap="square" lIns="182880" rIns="182880" tIns="137160" bIns="137160"/>
+          <a:bodyPr wrap="square" lIns="182880" tIns="137160" rIns="182880" bIns="137160" rtlCol="0" anchor="ctr"/>
           <a:lstStyle/>
           <a:p>
             <a:pPr algn="ctr">
@@ -3531,7 +3428,7 @@
           </a:fontRef>
         </p:style>
         <p:txBody>
-          <a:bodyPr rtlCol="0" anchor="ctr" wrap="square" lIns="182880" rIns="182880" tIns="137160" bIns="137160"/>
+          <a:bodyPr wrap="square" lIns="182880" tIns="137160" rIns="182880" bIns="137160" rtlCol="0" anchor="ctr"/>
           <a:lstStyle/>
           <a:p>
             <a:pPr algn="ctr">
@@ -3604,7 +3501,7 @@
           </a:fontRef>
         </p:style>
         <p:txBody>
-          <a:bodyPr rtlCol="0" anchor="ctr" wrap="square" lIns="182880" rIns="182880" tIns="137160" bIns="137160"/>
+          <a:bodyPr wrap="square" lIns="182880" tIns="137160" rIns="182880" bIns="137160" rtlCol="0" anchor="ctr"/>
           <a:lstStyle/>
           <a:p>
             <a:pPr algn="ctr">
@@ -3677,7 +3574,7 @@
           </a:fontRef>
         </p:style>
         <p:txBody>
-          <a:bodyPr rtlCol="0" anchor="ctr" wrap="square" lIns="182880" rIns="182880" tIns="137160" bIns="137160"/>
+          <a:bodyPr wrap="square" lIns="182880" tIns="137160" rIns="182880" bIns="137160" rtlCol="0" anchor="ctr"/>
           <a:lstStyle/>
           <a:p>
             <a:pPr algn="ctr">
@@ -3750,7 +3647,7 @@
           </a:fontRef>
         </p:style>
         <p:txBody>
-          <a:bodyPr rtlCol="0" anchor="ctr" wrap="square" lIns="182880" rIns="182880" tIns="137160" bIns="137160"/>
+          <a:bodyPr wrap="square" lIns="182880" tIns="137160" rIns="182880" bIns="137160" rtlCol="0" anchor="ctr"/>
           <a:lstStyle/>
           <a:p>
             <a:pPr algn="ctr">
@@ -3823,7 +3720,7 @@
           </a:fontRef>
         </p:style>
         <p:txBody>
-          <a:bodyPr rtlCol="0" anchor="ctr" wrap="square" lIns="182880" rIns="182880" tIns="137160" bIns="137160"/>
+          <a:bodyPr wrap="square" lIns="182880" tIns="137160" rIns="182880" bIns="137160" rtlCol="0" anchor="ctr"/>
           <a:lstStyle/>
           <a:p>
             <a:pPr algn="ctr">
@@ -3905,7 +3802,7 @@
 </file>
 
 <file path=ppt/slides/slide3.xml><?xml version="1.0" encoding="utf-8"?>
-<p:sld xmlns:a="http://schemas.openxmlformats.org/drawingml/2006/main" xmlns:p="http://schemas.openxmlformats.org/presentationml/2006/main" xmlns:r="http://schemas.openxmlformats.org/officeDocument/2006/relationships">
+<p:sld xmlns:a="http://schemas.openxmlformats.org/drawingml/2006/main" xmlns:r="http://schemas.openxmlformats.org/officeDocument/2006/relationships" xmlns:p="http://schemas.openxmlformats.org/presentationml/2006/main">
   <p:cSld>
     <p:bg>
       <p:bgPr>
@@ -3921,7 +3818,14 @@
         <p:cNvGrpSpPr/>
         <p:nvPr/>
       </p:nvGrpSpPr>
-      <p:grpSpPr/>
+      <p:grpSpPr>
+        <a:xfrm>
+          <a:off x="0" y="0"/>
+          <a:ext cx="0" cy="0"/>
+          <a:chOff x="0" y="0"/>
+          <a:chExt cx="0" cy="0"/>
+        </a:xfrm>
+      </p:grpSpPr>
       <p:sp>
         <p:nvSpPr>
           <p:cNvPr id="2" name="TextBox 1"/>
@@ -4013,8 +3917,20 @@
                 <a:tableStyleId>{5C22544A-7EE6-4342-B048-85BDC9FD1C3A}</a:tableStyleId>
               </a:tblPr>
               <a:tblGrid>
-                <a:gridCol w="2286000"/>
-                <a:gridCol w="2743200"/>
+                <a:gridCol w="2286000">
+                  <a:extLst>
+                    <a:ext uri="{9D8B030D-6E8A-4147-A177-3AD203B41FA5}">
+                      <a16:colId xmlns:a16="http://schemas.microsoft.com/office/drawing/2014/main" val="20000"/>
+                    </a:ext>
+                  </a:extLst>
+                </a:gridCol>
+                <a:gridCol w="2743200">
+                  <a:extLst>
+                    <a:ext uri="{9D8B030D-6E8A-4147-A177-3AD203B41FA5}">
+                      <a16:colId xmlns:a16="http://schemas.microsoft.com/office/drawing/2014/main" val="20001"/>
+                    </a:ext>
+                  </a:extLst>
+                </a:gridCol>
               </a:tblGrid>
               <a:tr h="320039">
                 <a:tc>
@@ -4035,7 +3951,7 @@
                       </a:r>
                     </a:p>
                   </a:txBody>
-                  <a:tcPr marL="91440" marR="91440" marT="45720" marB="45720">
+                  <a:tcPr>
                     <a:solidFill>
                       <a:srgbClr val="1D4ED8"/>
                     </a:solidFill>
@@ -4059,12 +3975,17 @@
                       </a:r>
                     </a:p>
                   </a:txBody>
-                  <a:tcPr marL="91440" marR="91440" marT="45720" marB="45720">
+                  <a:tcPr>
                     <a:solidFill>
                       <a:srgbClr val="1D4ED8"/>
                     </a:solidFill>
                   </a:tcPr>
                 </a:tc>
+                <a:extLst>
+                  <a:ext uri="{0D108BD9-81ED-4DB2-BD59-A6C34878D82A}">
+                    <a16:rowId xmlns:a16="http://schemas.microsoft.com/office/drawing/2014/main" val="10000"/>
+                  </a:ext>
+                </a:extLst>
               </a:tr>
               <a:tr h="320039">
                 <a:tc>
@@ -4082,7 +4003,7 @@
                       </a:r>
                     </a:p>
                   </a:txBody>
-                  <a:tcPr marL="91440" marR="91440" marT="45720" marB="45720">
+                  <a:tcPr>
                     <a:solidFill>
                       <a:srgbClr val="FFFFFF"/>
                     </a:solidFill>
@@ -4103,12 +4024,17 @@
                       </a:r>
                     </a:p>
                   </a:txBody>
-                  <a:tcPr marL="91440" marR="91440" marT="45720" marB="45720">
+                  <a:tcPr>
                     <a:solidFill>
                       <a:srgbClr val="FFFFFF"/>
                     </a:solidFill>
                   </a:tcPr>
                 </a:tc>
+                <a:extLst>
+                  <a:ext uri="{0D108BD9-81ED-4DB2-BD59-A6C34878D82A}">
+                    <a16:rowId xmlns:a16="http://schemas.microsoft.com/office/drawing/2014/main" val="10001"/>
+                  </a:ext>
+                </a:extLst>
               </a:tr>
               <a:tr h="320039">
                 <a:tc>
@@ -4126,7 +4052,7 @@
                       </a:r>
                     </a:p>
                   </a:txBody>
-                  <a:tcPr marL="91440" marR="91440" marT="45720" marB="45720">
+                  <a:tcPr>
                     <a:solidFill>
                       <a:srgbClr val="F1F5F9"/>
                     </a:solidFill>
@@ -4147,12 +4073,17 @@
                       </a:r>
                     </a:p>
                   </a:txBody>
-                  <a:tcPr marL="91440" marR="91440" marT="45720" marB="45720">
+                  <a:tcPr>
                     <a:solidFill>
                       <a:srgbClr val="F1F5F9"/>
                     </a:solidFill>
                   </a:tcPr>
                 </a:tc>
+                <a:extLst>
+                  <a:ext uri="{0D108BD9-81ED-4DB2-BD59-A6C34878D82A}">
+                    <a16:rowId xmlns:a16="http://schemas.microsoft.com/office/drawing/2014/main" val="10002"/>
+                  </a:ext>
+                </a:extLst>
               </a:tr>
               <a:tr h="320039">
                 <a:tc>
@@ -4170,7 +4101,7 @@
                       </a:r>
                     </a:p>
                   </a:txBody>
-                  <a:tcPr marL="91440" marR="91440" marT="45720" marB="45720">
+                  <a:tcPr>
                     <a:solidFill>
                       <a:srgbClr val="FFFFFF"/>
                     </a:solidFill>
@@ -4191,12 +4122,17 @@
                       </a:r>
                     </a:p>
                   </a:txBody>
-                  <a:tcPr marL="91440" marR="91440" marT="45720" marB="45720">
+                  <a:tcPr>
                     <a:solidFill>
                       <a:srgbClr val="FFFFFF"/>
                     </a:solidFill>
                   </a:tcPr>
                 </a:tc>
+                <a:extLst>
+                  <a:ext uri="{0D108BD9-81ED-4DB2-BD59-A6C34878D82A}">
+                    <a16:rowId xmlns:a16="http://schemas.microsoft.com/office/drawing/2014/main" val="10003"/>
+                  </a:ext>
+                </a:extLst>
               </a:tr>
               <a:tr h="320039">
                 <a:tc>
@@ -4214,7 +4150,7 @@
                       </a:r>
                     </a:p>
                   </a:txBody>
-                  <a:tcPr marL="91440" marR="91440" marT="45720" marB="45720">
+                  <a:tcPr>
                     <a:solidFill>
                       <a:srgbClr val="F1F5F9"/>
                     </a:solidFill>
@@ -4235,12 +4171,17 @@
                       </a:r>
                     </a:p>
                   </a:txBody>
-                  <a:tcPr marL="91440" marR="91440" marT="45720" marB="45720">
+                  <a:tcPr>
                     <a:solidFill>
                       <a:srgbClr val="F1F5F9"/>
                     </a:solidFill>
                   </a:tcPr>
                 </a:tc>
+                <a:extLst>
+                  <a:ext uri="{0D108BD9-81ED-4DB2-BD59-A6C34878D82A}">
+                    <a16:rowId xmlns:a16="http://schemas.microsoft.com/office/drawing/2014/main" val="10004"/>
+                  </a:ext>
+                </a:extLst>
               </a:tr>
               <a:tr h="320039">
                 <a:tc>
@@ -4258,7 +4199,7 @@
                       </a:r>
                     </a:p>
                   </a:txBody>
-                  <a:tcPr marL="91440" marR="91440" marT="45720" marB="45720">
+                  <a:tcPr>
                     <a:solidFill>
                       <a:srgbClr val="FFFFFF"/>
                     </a:solidFill>
@@ -4279,12 +4220,17 @@
                       </a:r>
                     </a:p>
                   </a:txBody>
-                  <a:tcPr marL="91440" marR="91440" marT="45720" marB="45720">
+                  <a:tcPr>
                     <a:solidFill>
                       <a:srgbClr val="FFFFFF"/>
                     </a:solidFill>
                   </a:tcPr>
                 </a:tc>
+                <a:extLst>
+                  <a:ext uri="{0D108BD9-81ED-4DB2-BD59-A6C34878D82A}">
+                    <a16:rowId xmlns:a16="http://schemas.microsoft.com/office/drawing/2014/main" val="10005"/>
+                  </a:ext>
+                </a:extLst>
               </a:tr>
               <a:tr h="320045">
                 <a:tc>
@@ -4302,7 +4248,7 @@
                       </a:r>
                     </a:p>
                   </a:txBody>
-                  <a:tcPr marL="91440" marR="91440" marT="45720" marB="45720">
+                  <a:tcPr>
                     <a:solidFill>
                       <a:srgbClr val="F1F5F9"/>
                     </a:solidFill>
@@ -4323,12 +4269,17 @@
                       </a:r>
                     </a:p>
                   </a:txBody>
-                  <a:tcPr marL="91440" marR="91440" marT="45720" marB="45720">
+                  <a:tcPr>
                     <a:solidFill>
                       <a:srgbClr val="F1F5F9"/>
                     </a:solidFill>
                   </a:tcPr>
                 </a:tc>
+                <a:extLst>
+                  <a:ext uri="{0D108BD9-81ED-4DB2-BD59-A6C34878D82A}">
+                    <a16:rowId xmlns:a16="http://schemas.microsoft.com/office/drawing/2014/main" val="10006"/>
+                  </a:ext>
+                </a:extLst>
               </a:tr>
             </a:tbl>
           </a:graphicData>
@@ -4389,8 +4340,20 @@
                 <a:tableStyleId>{5C22544A-7EE6-4342-B048-85BDC9FD1C3A}</a:tableStyleId>
               </a:tblPr>
               <a:tblGrid>
-                <a:gridCol w="2286000"/>
-                <a:gridCol w="2743200"/>
+                <a:gridCol w="2286000">
+                  <a:extLst>
+                    <a:ext uri="{9D8B030D-6E8A-4147-A177-3AD203B41FA5}">
+                      <a16:colId xmlns:a16="http://schemas.microsoft.com/office/drawing/2014/main" val="20000"/>
+                    </a:ext>
+                  </a:extLst>
+                </a:gridCol>
+                <a:gridCol w="2743200">
+                  <a:extLst>
+                    <a:ext uri="{9D8B030D-6E8A-4147-A177-3AD203B41FA5}">
+                      <a16:colId xmlns:a16="http://schemas.microsoft.com/office/drawing/2014/main" val="20001"/>
+                    </a:ext>
+                  </a:extLst>
+                </a:gridCol>
               </a:tblGrid>
               <a:tr h="320039">
                 <a:tc>
@@ -4411,7 +4374,7 @@
                       </a:r>
                     </a:p>
                   </a:txBody>
-                  <a:tcPr marL="91440" marR="91440" marT="45720" marB="45720">
+                  <a:tcPr>
                     <a:solidFill>
                       <a:srgbClr val="1D4ED8"/>
                     </a:solidFill>
@@ -4435,12 +4398,17 @@
                       </a:r>
                     </a:p>
                   </a:txBody>
-                  <a:tcPr marL="91440" marR="91440" marT="45720" marB="45720">
+                  <a:tcPr>
                     <a:solidFill>
                       <a:srgbClr val="1D4ED8"/>
                     </a:solidFill>
                   </a:tcPr>
                 </a:tc>
+                <a:extLst>
+                  <a:ext uri="{0D108BD9-81ED-4DB2-BD59-A6C34878D82A}">
+                    <a16:rowId xmlns:a16="http://schemas.microsoft.com/office/drawing/2014/main" val="10000"/>
+                  </a:ext>
+                </a:extLst>
               </a:tr>
               <a:tr h="320039">
                 <a:tc>
@@ -4458,7 +4426,7 @@
                       </a:r>
                     </a:p>
                   </a:txBody>
-                  <a:tcPr marL="91440" marR="91440" marT="45720" marB="45720">
+                  <a:tcPr>
                     <a:solidFill>
                       <a:srgbClr val="FFFFFF"/>
                     </a:solidFill>
@@ -4479,12 +4447,17 @@
                       </a:r>
                     </a:p>
                   </a:txBody>
-                  <a:tcPr marL="91440" marR="91440" marT="45720" marB="45720">
+                  <a:tcPr>
                     <a:solidFill>
                       <a:srgbClr val="FFFFFF"/>
                     </a:solidFill>
                   </a:tcPr>
                 </a:tc>
+                <a:extLst>
+                  <a:ext uri="{0D108BD9-81ED-4DB2-BD59-A6C34878D82A}">
+                    <a16:rowId xmlns:a16="http://schemas.microsoft.com/office/drawing/2014/main" val="10001"/>
+                  </a:ext>
+                </a:extLst>
               </a:tr>
               <a:tr h="320039">
                 <a:tc>
@@ -4502,7 +4475,7 @@
                       </a:r>
                     </a:p>
                   </a:txBody>
-                  <a:tcPr marL="91440" marR="91440" marT="45720" marB="45720">
+                  <a:tcPr>
                     <a:solidFill>
                       <a:srgbClr val="F1F5F9"/>
                     </a:solidFill>
@@ -4523,12 +4496,17 @@
                       </a:r>
                     </a:p>
                   </a:txBody>
-                  <a:tcPr marL="91440" marR="91440" marT="45720" marB="45720">
+                  <a:tcPr>
                     <a:solidFill>
                       <a:srgbClr val="F1F5F9"/>
                     </a:solidFill>
                   </a:tcPr>
                 </a:tc>
+                <a:extLst>
+                  <a:ext uri="{0D108BD9-81ED-4DB2-BD59-A6C34878D82A}">
+                    <a16:rowId xmlns:a16="http://schemas.microsoft.com/office/drawing/2014/main" val="10002"/>
+                  </a:ext>
+                </a:extLst>
               </a:tr>
               <a:tr h="320039">
                 <a:tc>
@@ -4546,7 +4524,7 @@
                       </a:r>
                     </a:p>
                   </a:txBody>
-                  <a:tcPr marL="91440" marR="91440" marT="45720" marB="45720">
+                  <a:tcPr>
                     <a:solidFill>
                       <a:srgbClr val="FFFFFF"/>
                     </a:solidFill>
@@ -4567,12 +4545,17 @@
                       </a:r>
                     </a:p>
                   </a:txBody>
-                  <a:tcPr marL="91440" marR="91440" marT="45720" marB="45720">
+                  <a:tcPr>
                     <a:solidFill>
                       <a:srgbClr val="FFFFFF"/>
                     </a:solidFill>
                   </a:tcPr>
                 </a:tc>
+                <a:extLst>
+                  <a:ext uri="{0D108BD9-81ED-4DB2-BD59-A6C34878D82A}">
+                    <a16:rowId xmlns:a16="http://schemas.microsoft.com/office/drawing/2014/main" val="10003"/>
+                  </a:ext>
+                </a:extLst>
               </a:tr>
               <a:tr h="320039">
                 <a:tc>
@@ -4590,7 +4573,7 @@
                       </a:r>
                     </a:p>
                   </a:txBody>
-                  <a:tcPr marL="91440" marR="91440" marT="45720" marB="45720">
+                  <a:tcPr>
                     <a:solidFill>
                       <a:srgbClr val="F1F5F9"/>
                     </a:solidFill>
@@ -4611,12 +4594,17 @@
                       </a:r>
                     </a:p>
                   </a:txBody>
-                  <a:tcPr marL="91440" marR="91440" marT="45720" marB="45720">
+                  <a:tcPr>
                     <a:solidFill>
                       <a:srgbClr val="F1F5F9"/>
                     </a:solidFill>
                   </a:tcPr>
                 </a:tc>
+                <a:extLst>
+                  <a:ext uri="{0D108BD9-81ED-4DB2-BD59-A6C34878D82A}">
+                    <a16:rowId xmlns:a16="http://schemas.microsoft.com/office/drawing/2014/main" val="10004"/>
+                  </a:ext>
+                </a:extLst>
               </a:tr>
               <a:tr h="320039">
                 <a:tc>
@@ -4634,7 +4622,7 @@
                       </a:r>
                     </a:p>
                   </a:txBody>
-                  <a:tcPr marL="91440" marR="91440" marT="45720" marB="45720">
+                  <a:tcPr>
                     <a:solidFill>
                       <a:srgbClr val="FFFFFF"/>
                     </a:solidFill>
@@ -4655,12 +4643,17 @@
                       </a:r>
                     </a:p>
                   </a:txBody>
-                  <a:tcPr marL="91440" marR="91440" marT="45720" marB="45720">
+                  <a:tcPr>
                     <a:solidFill>
                       <a:srgbClr val="FFFFFF"/>
                     </a:solidFill>
                   </a:tcPr>
                 </a:tc>
+                <a:extLst>
+                  <a:ext uri="{0D108BD9-81ED-4DB2-BD59-A6C34878D82A}">
+                    <a16:rowId xmlns:a16="http://schemas.microsoft.com/office/drawing/2014/main" val="10005"/>
+                  </a:ext>
+                </a:extLst>
               </a:tr>
               <a:tr h="320045">
                 <a:tc>
@@ -4678,7 +4671,7 @@
                       </a:r>
                     </a:p>
                   </a:txBody>
-                  <a:tcPr marL="91440" marR="91440" marT="45720" marB="45720">
+                  <a:tcPr>
                     <a:solidFill>
                       <a:srgbClr val="F1F5F9"/>
                     </a:solidFill>
@@ -4699,70 +4692,22 @@
                       </a:r>
                     </a:p>
                   </a:txBody>
-                  <a:tcPr marL="91440" marR="91440" marT="45720" marB="45720">
+                  <a:tcPr>
                     <a:solidFill>
                       <a:srgbClr val="F1F5F9"/>
                     </a:solidFill>
                   </a:tcPr>
                 </a:tc>
+                <a:extLst>
+                  <a:ext uri="{0D108BD9-81ED-4DB2-BD59-A6C34878D82A}">
+                    <a16:rowId xmlns:a16="http://schemas.microsoft.com/office/drawing/2014/main" val="10006"/>
+                  </a:ext>
+                </a:extLst>
               </a:tr>
             </a:tbl>
           </a:graphicData>
         </a:graphic>
       </p:graphicFrame>
-      <p:sp>
-        <p:nvSpPr>
-          <p:cNvPr id="7" name="Rounded Rectangle 6"/>
-          <p:cNvSpPr/>
-          <p:nvPr/>
-        </p:nvSpPr>
-        <p:spPr>
-          <a:xfrm>
-            <a:off x="640080" y="5029200"/>
-            <a:ext cx="10881360" cy="1005840"/>
-          </a:xfrm>
-          <a:prstGeom prst="roundRect">
-            <a:avLst/>
-          </a:prstGeom>
-          <a:solidFill>
-            <a:srgbClr val="1E3A5A"/>
-          </a:solidFill>
-          <a:ln>
-            <a:noFill/>
-          </a:ln>
-        </p:spPr>
-        <p:style>
-          <a:lnRef idx="1">
-            <a:schemeClr val="accent1"/>
-          </a:lnRef>
-          <a:fillRef idx="3">
-            <a:schemeClr val="accent1"/>
-          </a:fillRef>
-          <a:effectRef idx="2">
-            <a:schemeClr val="accent1"/>
-          </a:effectRef>
-          <a:fontRef idx="minor">
-            <a:schemeClr val="lt1"/>
-          </a:fontRef>
-        </p:style>
-        <p:txBody>
-          <a:bodyPr rtlCol="0" anchor="ctr" wrap="square" lIns="274320" tIns="137160"/>
-          <a:lstStyle/>
-          <a:p>
-            <a:pPr algn="ctr">
-              <a:defRPr sz="1500">
-                <a:solidFill>
-                  <a:srgbClr val="BBCCDD"/>
-                </a:solidFill>
-                <a:latin typeface="Arial"/>
-              </a:defRPr>
-            </a:pPr>
-            <a:r>
-              <a:t>Key Decision:  Single language (JavaScript) across the entire stack. SQLite requires zero configuration — ideal for rapid prototyping.</a:t>
-            </a:r>
-          </a:p>
-        </p:txBody>
-      </p:sp>
       <p:sp>
         <p:nvSpPr>
           <p:cNvPr id="8" name="TextBox 7"/>
@@ -4808,857 +4753,7 @@
 </file>
 
 <file path=ppt/slides/slide4.xml><?xml version="1.0" encoding="utf-8"?>
-<p:sld xmlns:a="http://schemas.openxmlformats.org/drawingml/2006/main" xmlns:p="http://schemas.openxmlformats.org/presentationml/2006/main" xmlns:r="http://schemas.openxmlformats.org/officeDocument/2006/relationships">
-  <p:cSld>
-    <p:bg>
-      <p:bgPr>
-        <a:solidFill>
-          <a:srgbClr val="F8FAFC"/>
-        </a:solidFill>
-        <a:effectLst/>
-      </p:bgPr>
-    </p:bg>
-    <p:spTree>
-      <p:nvGrpSpPr>
-        <p:cNvPr id="1" name=""/>
-        <p:cNvGrpSpPr/>
-        <p:nvPr/>
-      </p:nvGrpSpPr>
-      <p:grpSpPr/>
-      <p:sp>
-        <p:nvSpPr>
-          <p:cNvPr id="2" name="TextBox 1"/>
-          <p:cNvSpPr txBox="1"/>
-          <p:nvPr/>
-        </p:nvSpPr>
-        <p:spPr>
-          <a:xfrm>
-            <a:off x="640080" y="457200"/>
-            <a:ext cx="10058400" cy="640080"/>
-          </a:xfrm>
-          <a:prstGeom prst="rect">
-            <a:avLst/>
-          </a:prstGeom>
-          <a:noFill/>
-        </p:spPr>
-        <p:txBody>
-          <a:bodyPr wrap="square">
-            <a:spAutoFit/>
-          </a:bodyPr>
-          <a:lstStyle/>
-          <a:p>
-            <a:pPr algn="l">
-              <a:defRPr sz="3600" b="1">
-                <a:solidFill>
-                  <a:srgbClr val="1E293B"/>
-                </a:solidFill>
-                <a:latin typeface="Arial"/>
-              </a:defRPr>
-            </a:pPr>
-            <a:r>
-              <a:t>Technology Rationale</a:t>
-            </a:r>
-          </a:p>
-        </p:txBody>
-      </p:sp>
-      <p:sp>
-        <p:nvSpPr>
-          <p:cNvPr id="3" name="TextBox 2"/>
-          <p:cNvSpPr txBox="1"/>
-          <p:nvPr/>
-        </p:nvSpPr>
-        <p:spPr>
-          <a:xfrm>
-            <a:off x="640080" y="1554480"/>
-            <a:ext cx="5029200" cy="457200"/>
-          </a:xfrm>
-          <a:prstGeom prst="rect">
-            <a:avLst/>
-          </a:prstGeom>
-          <a:noFill/>
-        </p:spPr>
-        <p:txBody>
-          <a:bodyPr wrap="square">
-            <a:spAutoFit/>
-          </a:bodyPr>
-          <a:lstStyle/>
-          <a:p>
-            <a:pPr algn="l">
-              <a:defRPr sz="2000" b="1">
-                <a:solidFill>
-                  <a:srgbClr val="16A34A"/>
-                </a:solidFill>
-                <a:latin typeface="Arial"/>
-              </a:defRPr>
-            </a:pPr>
-            <a:r>
-              <a:t>✅  Chosen</a:t>
-            </a:r>
-          </a:p>
-        </p:txBody>
-      </p:sp>
-      <p:graphicFrame>
-        <p:nvGraphicFramePr>
-          <p:cNvPr id="4" name="Table 3"/>
-          <p:cNvGraphicFramePr>
-            <a:graphicFrameLocks noGrp="1"/>
-          </p:cNvGraphicFramePr>
-          <p:nvPr/>
-        </p:nvGraphicFramePr>
-        <p:xfrm>
-          <a:off x="640080" y="2103120"/>
-          <a:ext cx="5303520" cy="2240279"/>
-        </p:xfrm>
-        <a:graphic>
-          <a:graphicData uri="http://schemas.openxmlformats.org/drawingml/2006/table">
-            <a:tbl>
-              <a:tblPr firstRow="1" bandRow="1">
-                <a:tableStyleId>{5C22544A-7EE6-4342-B048-85BDC9FD1C3A}</a:tableStyleId>
-              </a:tblPr>
-              <a:tblGrid>
-                <a:gridCol w="2011680"/>
-                <a:gridCol w="3291840"/>
-              </a:tblGrid>
-              <a:tr h="320039">
-                <a:tc>
-                  <a:txBody>
-                    <a:bodyPr/>
-                    <a:lstStyle/>
-                    <a:p>
-                      <a:pPr>
-                        <a:defRPr sz="1200" b="1">
-                          <a:solidFill>
-                            <a:srgbClr val="FFFFFF"/>
-                          </a:solidFill>
-                          <a:latin typeface="Arial"/>
-                        </a:defRPr>
-                      </a:pPr>
-                      <a:r>
-                        <a:t>Technology</a:t>
-                      </a:r>
-                    </a:p>
-                  </a:txBody>
-                  <a:tcPr marL="91440" marR="91440" marT="45720" marB="45720">
-                    <a:solidFill>
-                      <a:srgbClr val="166534"/>
-                    </a:solidFill>
-                  </a:tcPr>
-                </a:tc>
-                <a:tc>
-                  <a:txBody>
-                    <a:bodyPr/>
-                    <a:lstStyle/>
-                    <a:p>
-                      <a:pPr>
-                        <a:defRPr sz="1200" b="1">
-                          <a:solidFill>
-                            <a:srgbClr val="FFFFFF"/>
-                          </a:solidFill>
-                          <a:latin typeface="Arial"/>
-                        </a:defRPr>
-                      </a:pPr>
-                      <a:r>
-                        <a:t>Rationale</a:t>
-                      </a:r>
-                    </a:p>
-                  </a:txBody>
-                  <a:tcPr marL="91440" marR="91440" marT="45720" marB="45720">
-                    <a:solidFill>
-                      <a:srgbClr val="166534"/>
-                    </a:solidFill>
-                  </a:tcPr>
-                </a:tc>
-              </a:tr>
-              <a:tr h="320039">
-                <a:tc>
-                  <a:txBody>
-                    <a:bodyPr/>
-                    <a:lstStyle/>
-                    <a:p>
-                      <a:pPr>
-                        <a:defRPr sz="1300">
-                          <a:latin typeface="Arial"/>
-                        </a:defRPr>
-                      </a:pPr>
-                      <a:r>
-                        <a:t>Express</a:t>
-                      </a:r>
-                    </a:p>
-                  </a:txBody>
-                  <a:tcPr marL="91440" marR="91440" marT="45720" marB="45720">
-                    <a:solidFill>
-                      <a:srgbClr val="FFFFFF"/>
-                    </a:solidFill>
-                  </a:tcPr>
-                </a:tc>
-                <a:tc>
-                  <a:txBody>
-                    <a:bodyPr/>
-                    <a:lstStyle/>
-                    <a:p>
-                      <a:pPr>
-                        <a:defRPr sz="1300">
-                          <a:latin typeface="Arial"/>
-                        </a:defRPr>
-                      </a:pPr>
-                      <a:r>
-                        <a:t>Lightweight, vast middleware ecosystem</a:t>
-                      </a:r>
-                    </a:p>
-                  </a:txBody>
-                  <a:tcPr marL="91440" marR="91440" marT="45720" marB="45720">
-                    <a:solidFill>
-                      <a:srgbClr val="FFFFFF"/>
-                    </a:solidFill>
-                  </a:tcPr>
-                </a:tc>
-              </a:tr>
-              <a:tr h="320039">
-                <a:tc>
-                  <a:txBody>
-                    <a:bodyPr/>
-                    <a:lstStyle/>
-                    <a:p>
-                      <a:pPr>
-                        <a:defRPr sz="1300">
-                          <a:latin typeface="Arial"/>
-                        </a:defRPr>
-                      </a:pPr>
-                      <a:r>
-                        <a:t>SQLite</a:t>
-                      </a:r>
-                    </a:p>
-                  </a:txBody>
-                  <a:tcPr marL="91440" marR="91440" marT="45720" marB="45720">
-                    <a:solidFill>
-                      <a:srgbClr val="F1F5F9"/>
-                    </a:solidFill>
-                  </a:tcPr>
-                </a:tc>
-                <a:tc>
-                  <a:txBody>
-                    <a:bodyPr/>
-                    <a:lstStyle/>
-                    <a:p>
-                      <a:pPr>
-                        <a:defRPr sz="1300">
-                          <a:latin typeface="Arial"/>
-                        </a:defRPr>
-                      </a:pPr>
-                      <a:r>
-                        <a:t>Zero-config, file-based, sync API</a:t>
-                      </a:r>
-                    </a:p>
-                  </a:txBody>
-                  <a:tcPr marL="91440" marR="91440" marT="45720" marB="45720">
-                    <a:solidFill>
-                      <a:srgbClr val="F1F5F9"/>
-                    </a:solidFill>
-                  </a:tcPr>
-                </a:tc>
-              </a:tr>
-              <a:tr h="320039">
-                <a:tc>
-                  <a:txBody>
-                    <a:bodyPr/>
-                    <a:lstStyle/>
-                    <a:p>
-                      <a:pPr>
-                        <a:defRPr sz="1300">
-                          <a:latin typeface="Arial"/>
-                        </a:defRPr>
-                      </a:pPr>
-                      <a:r>
-                        <a:t>Socket.IO</a:t>
-                      </a:r>
-                    </a:p>
-                  </a:txBody>
-                  <a:tcPr marL="91440" marR="91440" marT="45720" marB="45720">
-                    <a:solidFill>
-                      <a:srgbClr val="FFFFFF"/>
-                    </a:solidFill>
-                  </a:tcPr>
-                </a:tc>
-                <a:tc>
-                  <a:txBody>
-                    <a:bodyPr/>
-                    <a:lstStyle/>
-                    <a:p>
-                      <a:pPr>
-                        <a:defRPr sz="1300">
-                          <a:latin typeface="Arial"/>
-                        </a:defRPr>
-                      </a:pPr>
-                      <a:r>
-                        <a:t>Auto-reconnect, rooms, polling fallback</a:t>
-                      </a:r>
-                    </a:p>
-                  </a:txBody>
-                  <a:tcPr marL="91440" marR="91440" marT="45720" marB="45720">
-                    <a:solidFill>
-                      <a:srgbClr val="FFFFFF"/>
-                    </a:solidFill>
-                  </a:tcPr>
-                </a:tc>
-              </a:tr>
-              <a:tr h="320039">
-                <a:tc>
-                  <a:txBody>
-                    <a:bodyPr/>
-                    <a:lstStyle/>
-                    <a:p>
-                      <a:pPr>
-                        <a:defRPr sz="1300">
-                          <a:latin typeface="Arial"/>
-                        </a:defRPr>
-                      </a:pPr>
-                      <a:r>
-                        <a:t>Vite</a:t>
-                      </a:r>
-                    </a:p>
-                  </a:txBody>
-                  <a:tcPr marL="91440" marR="91440" marT="45720" marB="45720">
-                    <a:solidFill>
-                      <a:srgbClr val="F1F5F9"/>
-                    </a:solidFill>
-                  </a:tcPr>
-                </a:tc>
-                <a:tc>
-                  <a:txBody>
-                    <a:bodyPr/>
-                    <a:lstStyle/>
-                    <a:p>
-                      <a:pPr>
-                        <a:defRPr sz="1300">
-                          <a:latin typeface="Arial"/>
-                        </a:defRPr>
-                      </a:pPr>
-                      <a:r>
-                        <a:t>Instant HMR, 10× faster than Webpack</a:t>
-                      </a:r>
-                    </a:p>
-                  </a:txBody>
-                  <a:tcPr marL="91440" marR="91440" marT="45720" marB="45720">
-                    <a:solidFill>
-                      <a:srgbClr val="F1F5F9"/>
-                    </a:solidFill>
-                  </a:tcPr>
-                </a:tc>
-              </a:tr>
-              <a:tr h="320039">
-                <a:tc>
-                  <a:txBody>
-                    <a:bodyPr/>
-                    <a:lstStyle/>
-                    <a:p>
-                      <a:pPr>
-                        <a:defRPr sz="1300">
-                          <a:latin typeface="Arial"/>
-                        </a:defRPr>
-                      </a:pPr>
-                      <a:r>
-                        <a:t>Tailwind CSS</a:t>
-                      </a:r>
-                    </a:p>
-                  </a:txBody>
-                  <a:tcPr marL="91440" marR="91440" marT="45720" marB="45720">
-                    <a:solidFill>
-                      <a:srgbClr val="FFFFFF"/>
-                    </a:solidFill>
-                  </a:tcPr>
-                </a:tc>
-                <a:tc>
-                  <a:txBody>
-                    <a:bodyPr/>
-                    <a:lstStyle/>
-                    <a:p>
-                      <a:pPr>
-                        <a:defRPr sz="1300">
-                          <a:latin typeface="Arial"/>
-                        </a:defRPr>
-                      </a:pPr>
-                      <a:r>
-                        <a:t>Utility-first, tiny production bundle (~5KB)</a:t>
-                      </a:r>
-                    </a:p>
-                  </a:txBody>
-                  <a:tcPr marL="91440" marR="91440" marT="45720" marB="45720">
-                    <a:solidFill>
-                      <a:srgbClr val="FFFFFF"/>
-                    </a:solidFill>
-                  </a:tcPr>
-                </a:tc>
-              </a:tr>
-              <a:tr h="320045">
-                <a:tc>
-                  <a:txBody>
-                    <a:bodyPr/>
-                    <a:lstStyle/>
-                    <a:p>
-                      <a:pPr>
-                        <a:defRPr sz="1300">
-                          <a:latin typeface="Arial"/>
-                        </a:defRPr>
-                      </a:pPr>
-                      <a:r>
-                        <a:t>JWT</a:t>
-                      </a:r>
-                    </a:p>
-                  </a:txBody>
-                  <a:tcPr marL="91440" marR="91440" marT="45720" marB="45720">
-                    <a:solidFill>
-                      <a:srgbClr val="F1F5F9"/>
-                    </a:solidFill>
-                  </a:tcPr>
-                </a:tc>
-                <a:tc>
-                  <a:txBody>
-                    <a:bodyPr/>
-                    <a:lstStyle/>
-                    <a:p>
-                      <a:pPr>
-                        <a:defRPr sz="1300">
-                          <a:latin typeface="Arial"/>
-                        </a:defRPr>
-                      </a:pPr>
-                      <a:r>
-                        <a:t>Stateless, works with WebSocket auth</a:t>
-                      </a:r>
-                    </a:p>
-                  </a:txBody>
-                  <a:tcPr marL="91440" marR="91440" marT="45720" marB="45720">
-                    <a:solidFill>
-                      <a:srgbClr val="F1F5F9"/>
-                    </a:solidFill>
-                  </a:tcPr>
-                </a:tc>
-              </a:tr>
-            </a:tbl>
-          </a:graphicData>
-        </a:graphic>
-      </p:graphicFrame>
-      <p:sp>
-        <p:nvSpPr>
-          <p:cNvPr id="5" name="TextBox 4"/>
-          <p:cNvSpPr txBox="1"/>
-          <p:nvPr/>
-        </p:nvSpPr>
-        <p:spPr>
-          <a:xfrm>
-            <a:off x="6400800" y="1554480"/>
-            <a:ext cx="5029200" cy="457200"/>
-          </a:xfrm>
-          <a:prstGeom prst="rect">
-            <a:avLst/>
-          </a:prstGeom>
-          <a:noFill/>
-        </p:spPr>
-        <p:txBody>
-          <a:bodyPr wrap="square">
-            <a:spAutoFit/>
-          </a:bodyPr>
-          <a:lstStyle/>
-          <a:p>
-            <a:pPr algn="l">
-              <a:defRPr sz="2000" b="1">
-                <a:solidFill>
-                  <a:srgbClr val="DC2626"/>
-                </a:solidFill>
-                <a:latin typeface="Arial"/>
-              </a:defRPr>
-            </a:pPr>
-            <a:r>
-              <a:t>❌  Not Chosen</a:t>
-            </a:r>
-          </a:p>
-        </p:txBody>
-      </p:sp>
-      <p:graphicFrame>
-        <p:nvGraphicFramePr>
-          <p:cNvPr id="6" name="Table 5"/>
-          <p:cNvGraphicFramePr>
-            <a:graphicFrameLocks noGrp="1"/>
-          </p:cNvGraphicFramePr>
-          <p:nvPr/>
-        </p:nvGraphicFramePr>
-        <p:xfrm>
-          <a:off x="6400800" y="2103120"/>
-          <a:ext cx="5303520" cy="2240279"/>
-        </p:xfrm>
-        <a:graphic>
-          <a:graphicData uri="http://schemas.openxmlformats.org/drawingml/2006/table">
-            <a:tbl>
-              <a:tblPr firstRow="1" bandRow="1">
-                <a:tableStyleId>{5C22544A-7EE6-4342-B048-85BDC9FD1C3A}</a:tableStyleId>
-              </a:tblPr>
-              <a:tblGrid>
-                <a:gridCol w="2011680"/>
-                <a:gridCol w="3291840"/>
-              </a:tblGrid>
-              <a:tr h="320039">
-                <a:tc>
-                  <a:txBody>
-                    <a:bodyPr/>
-                    <a:lstStyle/>
-                    <a:p>
-                      <a:pPr>
-                        <a:defRPr sz="1200" b="1">
-                          <a:solidFill>
-                            <a:srgbClr val="FFFFFF"/>
-                          </a:solidFill>
-                          <a:latin typeface="Arial"/>
-                        </a:defRPr>
-                      </a:pPr>
-                      <a:r>
-                        <a:t>Alternative</a:t>
-                      </a:r>
-                    </a:p>
-                  </a:txBody>
-                  <a:tcPr marL="91440" marR="91440" marT="45720" marB="45720">
-                    <a:solidFill>
-                      <a:srgbClr val="DC2626"/>
-                    </a:solidFill>
-                  </a:tcPr>
-                </a:tc>
-                <a:tc>
-                  <a:txBody>
-                    <a:bodyPr/>
-                    <a:lstStyle/>
-                    <a:p>
-                      <a:pPr>
-                        <a:defRPr sz="1200" b="1">
-                          <a:solidFill>
-                            <a:srgbClr val="FFFFFF"/>
-                          </a:solidFill>
-                          <a:latin typeface="Arial"/>
-                        </a:defRPr>
-                      </a:pPr>
-                      <a:r>
-                        <a:t>Reason for Rejection</a:t>
-                      </a:r>
-                    </a:p>
-                  </a:txBody>
-                  <a:tcPr marL="91440" marR="91440" marT="45720" marB="45720">
-                    <a:solidFill>
-                      <a:srgbClr val="DC2626"/>
-                    </a:solidFill>
-                  </a:tcPr>
-                </a:tc>
-              </a:tr>
-              <a:tr h="320039">
-                <a:tc>
-                  <a:txBody>
-                    <a:bodyPr/>
-                    <a:lstStyle/>
-                    <a:p>
-                      <a:pPr>
-                        <a:defRPr sz="1300">
-                          <a:latin typeface="Arial"/>
-                        </a:defRPr>
-                      </a:pPr>
-                      <a:r>
-                        <a:t>Next.js</a:t>
-                      </a:r>
-                    </a:p>
-                  </a:txBody>
-                  <a:tcPr marL="91440" marR="91440" marT="45720" marB="45720">
-                    <a:solidFill>
-                      <a:srgbClr val="FFFFFF"/>
-                    </a:solidFill>
-                  </a:tcPr>
-                </a:tc>
-                <a:tc>
-                  <a:txBody>
-                    <a:bodyPr/>
-                    <a:lstStyle/>
-                    <a:p>
-                      <a:pPr>
-                        <a:defRPr sz="1300">
-                          <a:latin typeface="Arial"/>
-                        </a:defRPr>
-                      </a:pPr>
-                      <a:r>
-                        <a:t>Overkill for SPA; adds SSR complexity</a:t>
-                      </a:r>
-                    </a:p>
-                  </a:txBody>
-                  <a:tcPr marL="91440" marR="91440" marT="45720" marB="45720">
-                    <a:solidFill>
-                      <a:srgbClr val="FFFFFF"/>
-                    </a:solidFill>
-                  </a:tcPr>
-                </a:tc>
-              </a:tr>
-              <a:tr h="320039">
-                <a:tc>
-                  <a:txBody>
-                    <a:bodyPr/>
-                    <a:lstStyle/>
-                    <a:p>
-                      <a:pPr>
-                        <a:defRPr sz="1300">
-                          <a:latin typeface="Arial"/>
-                        </a:defRPr>
-                      </a:pPr>
-                      <a:r>
-                        <a:t>MongoDB</a:t>
-                      </a:r>
-                    </a:p>
-                  </a:txBody>
-                  <a:tcPr marL="91440" marR="91440" marT="45720" marB="45720">
-                    <a:solidFill>
-                      <a:srgbClr val="F1F5F9"/>
-                    </a:solidFill>
-                  </a:tcPr>
-                </a:tc>
-                <a:tc>
-                  <a:txBody>
-                    <a:bodyPr/>
-                    <a:lstStyle/>
-                    <a:p>
-                      <a:pPr>
-                        <a:defRPr sz="1300">
-                          <a:latin typeface="Arial"/>
-                        </a:defRPr>
-                      </a:pPr>
-                      <a:r>
-                        <a:t>External server needed; data is relational</a:t>
-                      </a:r>
-                    </a:p>
-                  </a:txBody>
-                  <a:tcPr marL="91440" marR="91440" marT="45720" marB="45720">
-                    <a:solidFill>
-                      <a:srgbClr val="F1F5F9"/>
-                    </a:solidFill>
-                  </a:tcPr>
-                </a:tc>
-              </a:tr>
-              <a:tr h="320039">
-                <a:tc>
-                  <a:txBody>
-                    <a:bodyPr/>
-                    <a:lstStyle/>
-                    <a:p>
-                      <a:pPr>
-                        <a:defRPr sz="1300">
-                          <a:latin typeface="Arial"/>
-                        </a:defRPr>
-                      </a:pPr>
-                      <a:r>
-                        <a:t>PostgreSQL</a:t>
-                      </a:r>
-                    </a:p>
-                  </a:txBody>
-                  <a:tcPr marL="91440" marR="91440" marT="45720" marB="45720">
-                    <a:solidFill>
-                      <a:srgbClr val="FFFFFF"/>
-                    </a:solidFill>
-                  </a:tcPr>
-                </a:tc>
-                <a:tc>
-                  <a:txBody>
-                    <a:bodyPr/>
-                    <a:lstStyle/>
-                    <a:p>
-                      <a:pPr>
-                        <a:defRPr sz="1300">
-                          <a:latin typeface="Arial"/>
-                        </a:defRPr>
-                      </a:pPr>
-                      <a:r>
-                        <a:t>Setup overhead for MVP stage</a:t>
-                      </a:r>
-                    </a:p>
-                  </a:txBody>
-                  <a:tcPr marL="91440" marR="91440" marT="45720" marB="45720">
-                    <a:solidFill>
-                      <a:srgbClr val="FFFFFF"/>
-                    </a:solidFill>
-                  </a:tcPr>
-                </a:tc>
-              </a:tr>
-              <a:tr h="320039">
-                <a:tc>
-                  <a:txBody>
-                    <a:bodyPr/>
-                    <a:lstStyle/>
-                    <a:p>
-                      <a:pPr>
-                        <a:defRPr sz="1300">
-                          <a:latin typeface="Arial"/>
-                        </a:defRPr>
-                      </a:pPr>
-                      <a:r>
-                        <a:t>Redux</a:t>
-                      </a:r>
-                    </a:p>
-                  </a:txBody>
-                  <a:tcPr marL="91440" marR="91440" marT="45720" marB="45720">
-                    <a:solidFill>
-                      <a:srgbClr val="F1F5F9"/>
-                    </a:solidFill>
-                  </a:tcPr>
-                </a:tc>
-                <a:tc>
-                  <a:txBody>
-                    <a:bodyPr/>
-                    <a:lstStyle/>
-                    <a:p>
-                      <a:pPr>
-                        <a:defRPr sz="1300">
-                          <a:latin typeface="Arial"/>
-                        </a:defRPr>
-                      </a:pPr>
-                      <a:r>
-                        <a:t>Excessive boilerplate; Context API suffices</a:t>
-                      </a:r>
-                    </a:p>
-                  </a:txBody>
-                  <a:tcPr marL="91440" marR="91440" marT="45720" marB="45720">
-                    <a:solidFill>
-                      <a:srgbClr val="F1F5F9"/>
-                    </a:solidFill>
-                  </a:tcPr>
-                </a:tc>
-              </a:tr>
-              <a:tr h="320039">
-                <a:tc>
-                  <a:txBody>
-                    <a:bodyPr/>
-                    <a:lstStyle/>
-                    <a:p>
-                      <a:pPr>
-                        <a:defRPr sz="1300">
-                          <a:latin typeface="Arial"/>
-                        </a:defRPr>
-                      </a:pPr>
-                      <a:r>
-                        <a:t>Webpack</a:t>
-                      </a:r>
-                    </a:p>
-                  </a:txBody>
-                  <a:tcPr marL="91440" marR="91440" marT="45720" marB="45720">
-                    <a:solidFill>
-                      <a:srgbClr val="FFFFFF"/>
-                    </a:solidFill>
-                  </a:tcPr>
-                </a:tc>
-                <a:tc>
-                  <a:txBody>
-                    <a:bodyPr/>
-                    <a:lstStyle/>
-                    <a:p>
-                      <a:pPr>
-                        <a:defRPr sz="1300">
-                          <a:latin typeface="Arial"/>
-                        </a:defRPr>
-                      </a:pPr>
-                      <a:r>
-                        <a:t>Slower dev server; complex configuration</a:t>
-                      </a:r>
-                    </a:p>
-                  </a:txBody>
-                  <a:tcPr marL="91440" marR="91440" marT="45720" marB="45720">
-                    <a:solidFill>
-                      <a:srgbClr val="FFFFFF"/>
-                    </a:solidFill>
-                  </a:tcPr>
-                </a:tc>
-              </a:tr>
-              <a:tr h="320045">
-                <a:tc>
-                  <a:txBody>
-                    <a:bodyPr/>
-                    <a:lstStyle/>
-                    <a:p>
-                      <a:pPr>
-                        <a:defRPr sz="1300">
-                          <a:latin typeface="Arial"/>
-                        </a:defRPr>
-                      </a:pPr>
-                      <a:r>
-                        <a:t>SASS</a:t>
-                      </a:r>
-                    </a:p>
-                  </a:txBody>
-                  <a:tcPr marL="91440" marR="91440" marT="45720" marB="45720">
-                    <a:solidFill>
-                      <a:srgbClr val="F1F5F9"/>
-                    </a:solidFill>
-                  </a:tcPr>
-                </a:tc>
-                <a:tc>
-                  <a:txBody>
-                    <a:bodyPr/>
-                    <a:lstStyle/>
-                    <a:p>
-                      <a:pPr>
-                        <a:defRPr sz="1300">
-                          <a:latin typeface="Arial"/>
-                        </a:defRPr>
-                      </a:pPr>
-                      <a:r>
-                        <a:t>Separate files; slower iteration</a:t>
-                      </a:r>
-                    </a:p>
-                  </a:txBody>
-                  <a:tcPr marL="91440" marR="91440" marT="45720" marB="45720">
-                    <a:solidFill>
-                      <a:srgbClr val="F1F5F9"/>
-                    </a:solidFill>
-                  </a:tcPr>
-                </a:tc>
-              </a:tr>
-            </a:tbl>
-          </a:graphicData>
-        </a:graphic>
-      </p:graphicFrame>
-      <p:sp>
-        <p:nvSpPr>
-          <p:cNvPr id="7" name="TextBox 6"/>
-          <p:cNvSpPr txBox="1"/>
-          <p:nvPr/>
-        </p:nvSpPr>
-        <p:spPr>
-          <a:xfrm>
-            <a:off x="11064240" y="6400800"/>
-            <a:ext cx="914400" cy="365760"/>
-          </a:xfrm>
-          <a:prstGeom prst="rect">
-            <a:avLst/>
-          </a:prstGeom>
-          <a:noFill/>
-        </p:spPr>
-        <p:txBody>
-          <a:bodyPr wrap="square">
-            <a:spAutoFit/>
-          </a:bodyPr>
-          <a:lstStyle/>
-          <a:p>
-            <a:pPr algn="r">
-              <a:defRPr sz="1100" b="0">
-                <a:solidFill>
-                  <a:srgbClr val="64748B"/>
-                </a:solidFill>
-                <a:latin typeface="Arial"/>
-              </a:defRPr>
-            </a:pPr>
-            <a:r>
-              <a:t>4 / 9</a:t>
-            </a:r>
-          </a:p>
-        </p:txBody>
-      </p:sp>
-    </p:spTree>
-  </p:cSld>
-  <p:clrMapOvr>
-    <a:masterClrMapping/>
-  </p:clrMapOvr>
-</p:sld>
-</file>
-
-<file path=ppt/slides/slide5.xml><?xml version="1.0" encoding="utf-8"?>
-<p:sld xmlns:a="http://schemas.openxmlformats.org/drawingml/2006/main" xmlns:p="http://schemas.openxmlformats.org/presentationml/2006/main" xmlns:r="http://schemas.openxmlformats.org/officeDocument/2006/relationships">
+<p:sld xmlns:a="http://schemas.openxmlformats.org/drawingml/2006/main" xmlns:r="http://schemas.openxmlformats.org/officeDocument/2006/relationships" xmlns:p="http://schemas.openxmlformats.org/presentationml/2006/main">
   <p:cSld>
     <p:bg>
       <p:bgPr>
@@ -5674,7 +4769,14 @@
         <p:cNvGrpSpPr/>
         <p:nvPr/>
       </p:nvGrpSpPr>
-      <p:grpSpPr/>
+      <p:grpSpPr>
+        <a:xfrm>
+          <a:off x="0" y="0"/>
+          <a:ext cx="0" cy="0"/>
+          <a:chOff x="0" y="0"/>
+          <a:chExt cx="0" cy="0"/>
+        </a:xfrm>
+      </p:grpSpPr>
       <p:sp>
         <p:nvSpPr>
           <p:cNvPr id="2" name="TextBox 1"/>
@@ -5757,7 +4859,7 @@
         </p:nvGraphicFramePr>
         <p:xfrm>
           <a:off x="640080" y="2103120"/>
-          <a:ext cx="5029200" cy="2560320"/>
+          <a:ext cx="5029200" cy="3230880"/>
         </p:xfrm>
         <a:graphic>
           <a:graphicData uri="http://schemas.openxmlformats.org/drawingml/2006/table">
@@ -5766,8 +4868,20 @@
                 <a:tableStyleId>{5C22544A-7EE6-4342-B048-85BDC9FD1C3A}</a:tableStyleId>
               </a:tblPr>
               <a:tblGrid>
-                <a:gridCol w="2286000"/>
-                <a:gridCol w="2743200"/>
+                <a:gridCol w="2286000">
+                  <a:extLst>
+                    <a:ext uri="{9D8B030D-6E8A-4147-A177-3AD203B41FA5}">
+                      <a16:colId xmlns:a16="http://schemas.microsoft.com/office/drawing/2014/main" val="20000"/>
+                    </a:ext>
+                  </a:extLst>
+                </a:gridCol>
+                <a:gridCol w="2743200">
+                  <a:extLst>
+                    <a:ext uri="{9D8B030D-6E8A-4147-A177-3AD203B41FA5}">
+                      <a16:colId xmlns:a16="http://schemas.microsoft.com/office/drawing/2014/main" val="20001"/>
+                    </a:ext>
+                  </a:extLst>
+                </a:gridCol>
               </a:tblGrid>
               <a:tr h="320040">
                 <a:tc>
@@ -5788,7 +4902,7 @@
                       </a:r>
                     </a:p>
                   </a:txBody>
-                  <a:tcPr marL="91440" marR="91440" marT="45720" marB="45720">
+                  <a:tcPr>
                     <a:solidFill>
                       <a:srgbClr val="1D4ED8"/>
                     </a:solidFill>
@@ -5812,12 +4926,17 @@
                       </a:r>
                     </a:p>
                   </a:txBody>
-                  <a:tcPr marL="91440" marR="91440" marT="45720" marB="45720">
+                  <a:tcPr>
                     <a:solidFill>
                       <a:srgbClr val="1D4ED8"/>
                     </a:solidFill>
                   </a:tcPr>
                 </a:tc>
+                <a:extLst>
+                  <a:ext uri="{0D108BD9-81ED-4DB2-BD59-A6C34878D82A}">
+                    <a16:rowId xmlns:a16="http://schemas.microsoft.com/office/drawing/2014/main" val="10000"/>
+                  </a:ext>
+                </a:extLst>
               </a:tr>
               <a:tr h="320040">
                 <a:tc>
@@ -5835,7 +4954,7 @@
                       </a:r>
                     </a:p>
                   </a:txBody>
-                  <a:tcPr marL="91440" marR="91440" marT="45720" marB="45720">
+                  <a:tcPr>
                     <a:solidFill>
                       <a:srgbClr val="FFFFFF"/>
                     </a:solidFill>
@@ -5856,12 +4975,17 @@
                       </a:r>
                     </a:p>
                   </a:txBody>
-                  <a:tcPr marL="91440" marR="91440" marT="45720" marB="45720">
+                  <a:tcPr>
                     <a:solidFill>
                       <a:srgbClr val="FFFFFF"/>
                     </a:solidFill>
                   </a:tcPr>
                 </a:tc>
+                <a:extLst>
+                  <a:ext uri="{0D108BD9-81ED-4DB2-BD59-A6C34878D82A}">
+                    <a16:rowId xmlns:a16="http://schemas.microsoft.com/office/drawing/2014/main" val="10001"/>
+                  </a:ext>
+                </a:extLst>
               </a:tr>
               <a:tr h="320040">
                 <a:tc>
@@ -5879,7 +5003,7 @@
                       </a:r>
                     </a:p>
                   </a:txBody>
-                  <a:tcPr marL="91440" marR="91440" marT="45720" marB="45720">
+                  <a:tcPr>
                     <a:solidFill>
                       <a:srgbClr val="F1F5F9"/>
                     </a:solidFill>
@@ -5900,12 +5024,17 @@
                       </a:r>
                     </a:p>
                   </a:txBody>
-                  <a:tcPr marL="91440" marR="91440" marT="45720" marB="45720">
+                  <a:tcPr>
                     <a:solidFill>
                       <a:srgbClr val="F1F5F9"/>
                     </a:solidFill>
                   </a:tcPr>
                 </a:tc>
+                <a:extLst>
+                  <a:ext uri="{0D108BD9-81ED-4DB2-BD59-A6C34878D82A}">
+                    <a16:rowId xmlns:a16="http://schemas.microsoft.com/office/drawing/2014/main" val="10002"/>
+                  </a:ext>
+                </a:extLst>
               </a:tr>
               <a:tr h="320040">
                 <a:tc>
@@ -5923,7 +5052,7 @@
                       </a:r>
                     </a:p>
                   </a:txBody>
-                  <a:tcPr marL="91440" marR="91440" marT="45720" marB="45720">
+                  <a:tcPr>
                     <a:solidFill>
                       <a:srgbClr val="FFFFFF"/>
                     </a:solidFill>
@@ -5944,12 +5073,17 @@
                       </a:r>
                     </a:p>
                   </a:txBody>
-                  <a:tcPr marL="91440" marR="91440" marT="45720" marB="45720">
+                  <a:tcPr>
                     <a:solidFill>
                       <a:srgbClr val="FFFFFF"/>
                     </a:solidFill>
                   </a:tcPr>
                 </a:tc>
+                <a:extLst>
+                  <a:ext uri="{0D108BD9-81ED-4DB2-BD59-A6C34878D82A}">
+                    <a16:rowId xmlns:a16="http://schemas.microsoft.com/office/drawing/2014/main" val="10003"/>
+                  </a:ext>
+                </a:extLst>
               </a:tr>
               <a:tr h="320040">
                 <a:tc>
@@ -5967,7 +5101,7 @@
                       </a:r>
                     </a:p>
                   </a:txBody>
-                  <a:tcPr marL="91440" marR="91440" marT="45720" marB="45720">
+                  <a:tcPr>
                     <a:solidFill>
                       <a:srgbClr val="F1F5F9"/>
                     </a:solidFill>
@@ -5988,12 +5122,17 @@
                       </a:r>
                     </a:p>
                   </a:txBody>
-                  <a:tcPr marL="91440" marR="91440" marT="45720" marB="45720">
+                  <a:tcPr>
                     <a:solidFill>
                       <a:srgbClr val="F1F5F9"/>
                     </a:solidFill>
                   </a:tcPr>
                 </a:tc>
+                <a:extLst>
+                  <a:ext uri="{0D108BD9-81ED-4DB2-BD59-A6C34878D82A}">
+                    <a16:rowId xmlns:a16="http://schemas.microsoft.com/office/drawing/2014/main" val="10004"/>
+                  </a:ext>
+                </a:extLst>
               </a:tr>
               <a:tr h="320040">
                 <a:tc>
@@ -6011,7 +5150,7 @@
                       </a:r>
                     </a:p>
                   </a:txBody>
-                  <a:tcPr marL="91440" marR="91440" marT="45720" marB="45720">
+                  <a:tcPr>
                     <a:solidFill>
                       <a:srgbClr val="FFFFFF"/>
                     </a:solidFill>
@@ -6032,12 +5171,17 @@
                       </a:r>
                     </a:p>
                   </a:txBody>
-                  <a:tcPr marL="91440" marR="91440" marT="45720" marB="45720">
+                  <a:tcPr>
                     <a:solidFill>
                       <a:srgbClr val="FFFFFF"/>
                     </a:solidFill>
                   </a:tcPr>
                 </a:tc>
+                <a:extLst>
+                  <a:ext uri="{0D108BD9-81ED-4DB2-BD59-A6C34878D82A}">
+                    <a16:rowId xmlns:a16="http://schemas.microsoft.com/office/drawing/2014/main" val="10005"/>
+                  </a:ext>
+                </a:extLst>
               </a:tr>
               <a:tr h="320040">
                 <a:tc>
@@ -6055,7 +5199,7 @@
                       </a:r>
                     </a:p>
                   </a:txBody>
-                  <a:tcPr marL="91440" marR="91440" marT="45720" marB="45720">
+                  <a:tcPr>
                     <a:solidFill>
                       <a:srgbClr val="F1F5F9"/>
                     </a:solidFill>
@@ -6076,12 +5220,17 @@
                       </a:r>
                     </a:p>
                   </a:txBody>
-                  <a:tcPr marL="91440" marR="91440" marT="45720" marB="45720">
+                  <a:tcPr>
                     <a:solidFill>
                       <a:srgbClr val="F1F5F9"/>
                     </a:solidFill>
                   </a:tcPr>
                 </a:tc>
+                <a:extLst>
+                  <a:ext uri="{0D108BD9-81ED-4DB2-BD59-A6C34878D82A}">
+                    <a16:rowId xmlns:a16="http://schemas.microsoft.com/office/drawing/2014/main" val="10006"/>
+                  </a:ext>
+                </a:extLst>
               </a:tr>
               <a:tr h="320040">
                 <a:tc>
@@ -6099,7 +5248,7 @@
                       </a:r>
                     </a:p>
                   </a:txBody>
-                  <a:tcPr marL="91440" marR="91440" marT="45720" marB="45720">
+                  <a:tcPr>
                     <a:solidFill>
                       <a:srgbClr val="FFFFFF"/>
                     </a:solidFill>
@@ -6120,12 +5269,17 @@
                       </a:r>
                     </a:p>
                   </a:txBody>
-                  <a:tcPr marL="91440" marR="91440" marT="45720" marB="45720">
+                  <a:tcPr>
                     <a:solidFill>
                       <a:srgbClr val="FFFFFF"/>
                     </a:solidFill>
                   </a:tcPr>
                 </a:tc>
+                <a:extLst>
+                  <a:ext uri="{0D108BD9-81ED-4DB2-BD59-A6C34878D82A}">
+                    <a16:rowId xmlns:a16="http://schemas.microsoft.com/office/drawing/2014/main" val="10007"/>
+                  </a:ext>
+                </a:extLst>
               </a:tr>
             </a:tbl>
           </a:graphicData>
@@ -6311,1538 +5465,8 @@
 </p:sld>
 </file>
 
-<file path=ppt/slides/slide6.xml><?xml version="1.0" encoding="utf-8"?>
-<p:sld xmlns:a="http://schemas.openxmlformats.org/drawingml/2006/main" xmlns:p="http://schemas.openxmlformats.org/presentationml/2006/main" xmlns:r="http://schemas.openxmlformats.org/officeDocument/2006/relationships">
-  <p:cSld>
-    <p:bg>
-      <p:bgPr>
-        <a:solidFill>
-          <a:srgbClr val="F8FAFC"/>
-        </a:solidFill>
-        <a:effectLst/>
-      </p:bgPr>
-    </p:bg>
-    <p:spTree>
-      <p:nvGrpSpPr>
-        <p:cNvPr id="1" name=""/>
-        <p:cNvGrpSpPr/>
-        <p:nvPr/>
-      </p:nvGrpSpPr>
-      <p:grpSpPr/>
-      <p:sp>
-        <p:nvSpPr>
-          <p:cNvPr id="2" name="TextBox 1"/>
-          <p:cNvSpPr txBox="1"/>
-          <p:nvPr/>
-        </p:nvSpPr>
-        <p:spPr>
-          <a:xfrm>
-            <a:off x="640080" y="457200"/>
-            <a:ext cx="10058400" cy="640080"/>
-          </a:xfrm>
-          <a:prstGeom prst="rect">
-            <a:avLst/>
-          </a:prstGeom>
-          <a:noFill/>
-        </p:spPr>
-        <p:txBody>
-          <a:bodyPr wrap="square">
-            <a:spAutoFit/>
-          </a:bodyPr>
-          <a:lstStyle/>
-          <a:p>
-            <a:pPr algn="l">
-              <a:defRPr sz="3600" b="1">
-                <a:solidFill>
-                  <a:srgbClr val="1E293B"/>
-                </a:solidFill>
-                <a:latin typeface="Arial"/>
-              </a:defRPr>
-            </a:pPr>
-            <a:r>
-              <a:t>API &amp; WebSocket Design</a:t>
-            </a:r>
-          </a:p>
-        </p:txBody>
-      </p:sp>
-      <p:sp>
-        <p:nvSpPr>
-          <p:cNvPr id="3" name="TextBox 2"/>
-          <p:cNvSpPr txBox="1"/>
-          <p:nvPr/>
-        </p:nvSpPr>
-        <p:spPr>
-          <a:xfrm>
-            <a:off x="640080" y="1554480"/>
-            <a:ext cx="5029200" cy="457200"/>
-          </a:xfrm>
-          <a:prstGeom prst="rect">
-            <a:avLst/>
-          </a:prstGeom>
-          <a:noFill/>
-        </p:spPr>
-        <p:txBody>
-          <a:bodyPr wrap="square">
-            <a:spAutoFit/>
-          </a:bodyPr>
-          <a:lstStyle/>
-          <a:p>
-            <a:pPr algn="l">
-              <a:defRPr sz="2000" b="1">
-                <a:solidFill>
-                  <a:srgbClr val="3B82F6"/>
-                </a:solidFill>
-                <a:latin typeface="Arial"/>
-              </a:defRPr>
-            </a:pPr>
-            <a:r>
-              <a:t>REST API — 14 Endpoints</a:t>
-            </a:r>
-          </a:p>
-        </p:txBody>
-      </p:sp>
-      <p:graphicFrame>
-        <p:nvGraphicFramePr>
-          <p:cNvPr id="4" name="Table 3"/>
-          <p:cNvGraphicFramePr>
-            <a:graphicFrameLocks noGrp="1"/>
-          </p:cNvGraphicFramePr>
-          <p:nvPr/>
-        </p:nvGraphicFramePr>
-        <p:xfrm>
-          <a:off x="640080" y="2103120"/>
-          <a:ext cx="5303520" cy="3200400"/>
-        </p:xfrm>
-        <a:graphic>
-          <a:graphicData uri="http://schemas.openxmlformats.org/drawingml/2006/table">
-            <a:tbl>
-              <a:tblPr firstRow="1" bandRow="1">
-                <a:tableStyleId>{5C22544A-7EE6-4342-B048-85BDC9FD1C3A}</a:tableStyleId>
-              </a:tblPr>
-              <a:tblGrid>
-                <a:gridCol w="914400"/>
-                <a:gridCol w="2743200"/>
-                <a:gridCol w="1645920"/>
-              </a:tblGrid>
-              <a:tr h="320040">
-                <a:tc>
-                  <a:txBody>
-                    <a:bodyPr/>
-                    <a:lstStyle/>
-                    <a:p>
-                      <a:pPr>
-                        <a:defRPr sz="1200" b="1">
-                          <a:solidFill>
-                            <a:srgbClr val="FFFFFF"/>
-                          </a:solidFill>
-                          <a:latin typeface="Arial"/>
-                        </a:defRPr>
-                      </a:pPr>
-                      <a:r>
-                        <a:t>Method</a:t>
-                      </a:r>
-                    </a:p>
-                  </a:txBody>
-                  <a:tcPr marL="91440" marR="91440" marT="45720" marB="45720">
-                    <a:solidFill>
-                      <a:srgbClr val="1D4ED8"/>
-                    </a:solidFill>
-                  </a:tcPr>
-                </a:tc>
-                <a:tc>
-                  <a:txBody>
-                    <a:bodyPr/>
-                    <a:lstStyle/>
-                    <a:p>
-                      <a:pPr>
-                        <a:defRPr sz="1200" b="1">
-                          <a:solidFill>
-                            <a:srgbClr val="FFFFFF"/>
-                          </a:solidFill>
-                          <a:latin typeface="Arial"/>
-                        </a:defRPr>
-                      </a:pPr>
-                      <a:r>
-                        <a:t>Endpoint</a:t>
-                      </a:r>
-                    </a:p>
-                  </a:txBody>
-                  <a:tcPr marL="91440" marR="91440" marT="45720" marB="45720">
-                    <a:solidFill>
-                      <a:srgbClr val="1D4ED8"/>
-                    </a:solidFill>
-                  </a:tcPr>
-                </a:tc>
-                <a:tc>
-                  <a:txBody>
-                    <a:bodyPr/>
-                    <a:lstStyle/>
-                    <a:p>
-                      <a:pPr>
-                        <a:defRPr sz="1200" b="1">
-                          <a:solidFill>
-                            <a:srgbClr val="FFFFFF"/>
-                          </a:solidFill>
-                          <a:latin typeface="Arial"/>
-                        </a:defRPr>
-                      </a:pPr>
-                      <a:r>
-                        <a:t>Description</a:t>
-                      </a:r>
-                    </a:p>
-                  </a:txBody>
-                  <a:tcPr marL="91440" marR="91440" marT="45720" marB="45720">
-                    <a:solidFill>
-                      <a:srgbClr val="1D4ED8"/>
-                    </a:solidFill>
-                  </a:tcPr>
-                </a:tc>
-              </a:tr>
-              <a:tr h="320040">
-                <a:tc>
-                  <a:txBody>
-                    <a:bodyPr/>
-                    <a:lstStyle/>
-                    <a:p>
-                      <a:pPr>
-                        <a:defRPr sz="1300">
-                          <a:latin typeface="Arial"/>
-                        </a:defRPr>
-                      </a:pPr>
-                      <a:r>
-                        <a:t>POST</a:t>
-                      </a:r>
-                    </a:p>
-                  </a:txBody>
-                  <a:tcPr marL="91440" marR="91440" marT="45720" marB="45720">
-                    <a:solidFill>
-                      <a:srgbClr val="FFFFFF"/>
-                    </a:solidFill>
-                  </a:tcPr>
-                </a:tc>
-                <a:tc>
-                  <a:txBody>
-                    <a:bodyPr/>
-                    <a:lstStyle/>
-                    <a:p>
-                      <a:pPr>
-                        <a:defRPr sz="1300">
-                          <a:latin typeface="Arial"/>
-                        </a:defRPr>
-                      </a:pPr>
-                      <a:r>
-                        <a:t>/api/auth/register</a:t>
-                      </a:r>
-                    </a:p>
-                  </a:txBody>
-                  <a:tcPr marL="91440" marR="91440" marT="45720" marB="45720">
-                    <a:solidFill>
-                      <a:srgbClr val="FFFFFF"/>
-                    </a:solidFill>
-                  </a:tcPr>
-                </a:tc>
-                <a:tc>
-                  <a:txBody>
-                    <a:bodyPr/>
-                    <a:lstStyle/>
-                    <a:p>
-                      <a:pPr>
-                        <a:defRPr sz="1300">
-                          <a:latin typeface="Arial"/>
-                        </a:defRPr>
-                      </a:pPr>
-                      <a:r>
-                        <a:t>Create account with role</a:t>
-                      </a:r>
-                    </a:p>
-                  </a:txBody>
-                  <a:tcPr marL="91440" marR="91440" marT="45720" marB="45720">
-                    <a:solidFill>
-                      <a:srgbClr val="FFFFFF"/>
-                    </a:solidFill>
-                  </a:tcPr>
-                </a:tc>
-              </a:tr>
-              <a:tr h="320040">
-                <a:tc>
-                  <a:txBody>
-                    <a:bodyPr/>
-                    <a:lstStyle/>
-                    <a:p>
-                      <a:pPr>
-                        <a:defRPr sz="1300">
-                          <a:latin typeface="Arial"/>
-                        </a:defRPr>
-                      </a:pPr>
-                      <a:r>
-                        <a:t>POST</a:t>
-                      </a:r>
-                    </a:p>
-                  </a:txBody>
-                  <a:tcPr marL="91440" marR="91440" marT="45720" marB="45720">
-                    <a:solidFill>
-                      <a:srgbClr val="F1F5F9"/>
-                    </a:solidFill>
-                  </a:tcPr>
-                </a:tc>
-                <a:tc>
-                  <a:txBody>
-                    <a:bodyPr/>
-                    <a:lstStyle/>
-                    <a:p>
-                      <a:pPr>
-                        <a:defRPr sz="1300">
-                          <a:latin typeface="Arial"/>
-                        </a:defRPr>
-                      </a:pPr>
-                      <a:r>
-                        <a:t>/api/auth/login</a:t>
-                      </a:r>
-                    </a:p>
-                  </a:txBody>
-                  <a:tcPr marL="91440" marR="91440" marT="45720" marB="45720">
-                    <a:solidFill>
-                      <a:srgbClr val="F1F5F9"/>
-                    </a:solidFill>
-                  </a:tcPr>
-                </a:tc>
-                <a:tc>
-                  <a:txBody>
-                    <a:bodyPr/>
-                    <a:lstStyle/>
-                    <a:p>
-                      <a:pPr>
-                        <a:defRPr sz="1300">
-                          <a:latin typeface="Arial"/>
-                        </a:defRPr>
-                      </a:pPr>
-                      <a:r>
-                        <a:t>Get JWT token</a:t>
-                      </a:r>
-                    </a:p>
-                  </a:txBody>
-                  <a:tcPr marL="91440" marR="91440" marT="45720" marB="45720">
-                    <a:solidFill>
-                      <a:srgbClr val="F1F5F9"/>
-                    </a:solidFill>
-                  </a:tcPr>
-                </a:tc>
-              </a:tr>
-              <a:tr h="320040">
-                <a:tc>
-                  <a:txBody>
-                    <a:bodyPr/>
-                    <a:lstStyle/>
-                    <a:p>
-                      <a:pPr>
-                        <a:defRPr sz="1300">
-                          <a:latin typeface="Arial"/>
-                        </a:defRPr>
-                      </a:pPr>
-                      <a:r>
-                        <a:t>GET</a:t>
-                      </a:r>
-                    </a:p>
-                  </a:txBody>
-                  <a:tcPr marL="91440" marR="91440" marT="45720" marB="45720">
-                    <a:solidFill>
-                      <a:srgbClr val="FFFFFF"/>
-                    </a:solidFill>
-                  </a:tcPr>
-                </a:tc>
-                <a:tc>
-                  <a:txBody>
-                    <a:bodyPr/>
-                    <a:lstStyle/>
-                    <a:p>
-                      <a:pPr>
-                        <a:defRPr sz="1300">
-                          <a:latin typeface="Arial"/>
-                        </a:defRPr>
-                      </a:pPr>
-                      <a:r>
-                        <a:t>/api/quizzes</a:t>
-                      </a:r>
-                    </a:p>
-                  </a:txBody>
-                  <a:tcPr marL="91440" marR="91440" marT="45720" marB="45720">
-                    <a:solidFill>
-                      <a:srgbClr val="FFFFFF"/>
-                    </a:solidFill>
-                  </a:tcPr>
-                </a:tc>
-                <a:tc>
-                  <a:txBody>
-                    <a:bodyPr/>
-                    <a:lstStyle/>
-                    <a:p>
-                      <a:pPr>
-                        <a:defRPr sz="1300">
-                          <a:latin typeface="Arial"/>
-                        </a:defRPr>
-                      </a:pPr>
-                      <a:r>
-                        <a:t>List organizer's quizzes</a:t>
-                      </a:r>
-                    </a:p>
-                  </a:txBody>
-                  <a:tcPr marL="91440" marR="91440" marT="45720" marB="45720">
-                    <a:solidFill>
-                      <a:srgbClr val="FFFFFF"/>
-                    </a:solidFill>
-                  </a:tcPr>
-                </a:tc>
-              </a:tr>
-              <a:tr h="320040">
-                <a:tc>
-                  <a:txBody>
-                    <a:bodyPr/>
-                    <a:lstStyle/>
-                    <a:p>
-                      <a:pPr>
-                        <a:defRPr sz="1300">
-                          <a:latin typeface="Arial"/>
-                        </a:defRPr>
-                      </a:pPr>
-                      <a:r>
-                        <a:t>POST</a:t>
-                      </a:r>
-                    </a:p>
-                  </a:txBody>
-                  <a:tcPr marL="91440" marR="91440" marT="45720" marB="45720">
-                    <a:solidFill>
-                      <a:srgbClr val="F1F5F9"/>
-                    </a:solidFill>
-                  </a:tcPr>
-                </a:tc>
-                <a:tc>
-                  <a:txBody>
-                    <a:bodyPr/>
-                    <a:lstStyle/>
-                    <a:p>
-                      <a:pPr>
-                        <a:defRPr sz="1300">
-                          <a:latin typeface="Arial"/>
-                        </a:defRPr>
-                      </a:pPr>
-                      <a:r>
-                        <a:t>/api/quizzes</a:t>
-                      </a:r>
-                    </a:p>
-                  </a:txBody>
-                  <a:tcPr marL="91440" marR="91440" marT="45720" marB="45720">
-                    <a:solidFill>
-                      <a:srgbClr val="F1F5F9"/>
-                    </a:solidFill>
-                  </a:tcPr>
-                </a:tc>
-                <a:tc>
-                  <a:txBody>
-                    <a:bodyPr/>
-                    <a:lstStyle/>
-                    <a:p>
-                      <a:pPr>
-                        <a:defRPr sz="1300">
-                          <a:latin typeface="Arial"/>
-                        </a:defRPr>
-                      </a:pPr>
-                      <a:r>
-                        <a:t>Create new quiz</a:t>
-                      </a:r>
-                    </a:p>
-                  </a:txBody>
-                  <a:tcPr marL="91440" marR="91440" marT="45720" marB="45720">
-                    <a:solidFill>
-                      <a:srgbClr val="F1F5F9"/>
-                    </a:solidFill>
-                  </a:tcPr>
-                </a:tc>
-              </a:tr>
-              <a:tr h="320040">
-                <a:tc>
-                  <a:txBody>
-                    <a:bodyPr/>
-                    <a:lstStyle/>
-                    <a:p>
-                      <a:pPr>
-                        <a:defRPr sz="1300">
-                          <a:latin typeface="Arial"/>
-                        </a:defRPr>
-                      </a:pPr>
-                      <a:r>
-                        <a:t>PUT</a:t>
-                      </a:r>
-                    </a:p>
-                  </a:txBody>
-                  <a:tcPr marL="91440" marR="91440" marT="45720" marB="45720">
-                    <a:solidFill>
-                      <a:srgbClr val="FFFFFF"/>
-                    </a:solidFill>
-                  </a:tcPr>
-                </a:tc>
-                <a:tc>
-                  <a:txBody>
-                    <a:bodyPr/>
-                    <a:lstStyle/>
-                    <a:p>
-                      <a:pPr>
-                        <a:defRPr sz="1300">
-                          <a:latin typeface="Arial"/>
-                        </a:defRPr>
-                      </a:pPr>
-                      <a:r>
-                        <a:t>/api/quizzes/:id</a:t>
-                      </a:r>
-                    </a:p>
-                  </a:txBody>
-                  <a:tcPr marL="91440" marR="91440" marT="45720" marB="45720">
-                    <a:solidFill>
-                      <a:srgbClr val="FFFFFF"/>
-                    </a:solidFill>
-                  </a:tcPr>
-                </a:tc>
-                <a:tc>
-                  <a:txBody>
-                    <a:bodyPr/>
-                    <a:lstStyle/>
-                    <a:p>
-                      <a:pPr>
-                        <a:defRPr sz="1300">
-                          <a:latin typeface="Arial"/>
-                        </a:defRPr>
-                      </a:pPr>
-                      <a:r>
-                        <a:t>Update quiz settings</a:t>
-                      </a:r>
-                    </a:p>
-                  </a:txBody>
-                  <a:tcPr marL="91440" marR="91440" marT="45720" marB="45720">
-                    <a:solidFill>
-                      <a:srgbClr val="FFFFFF"/>
-                    </a:solidFill>
-                  </a:tcPr>
-                </a:tc>
-              </a:tr>
-              <a:tr h="320040">
-                <a:tc>
-                  <a:txBody>
-                    <a:bodyPr/>
-                    <a:lstStyle/>
-                    <a:p>
-                      <a:pPr>
-                        <a:defRPr sz="1300">
-                          <a:latin typeface="Arial"/>
-                        </a:defRPr>
-                      </a:pPr>
-                      <a:r>
-                        <a:t>POST</a:t>
-                      </a:r>
-                    </a:p>
-                  </a:txBody>
-                  <a:tcPr marL="91440" marR="91440" marT="45720" marB="45720">
-                    <a:solidFill>
-                      <a:srgbClr val="F1F5F9"/>
-                    </a:solidFill>
-                  </a:tcPr>
-                </a:tc>
-                <a:tc>
-                  <a:txBody>
-                    <a:bodyPr/>
-                    <a:lstStyle/>
-                    <a:p>
-                      <a:pPr>
-                        <a:defRPr sz="1300">
-                          <a:latin typeface="Arial"/>
-                        </a:defRPr>
-                      </a:pPr>
-                      <a:r>
-                        <a:t>/api/quizzes/:id/questions</a:t>
-                      </a:r>
-                    </a:p>
-                  </a:txBody>
-                  <a:tcPr marL="91440" marR="91440" marT="45720" marB="45720">
-                    <a:solidFill>
-                      <a:srgbClr val="F1F5F9"/>
-                    </a:solidFill>
-                  </a:tcPr>
-                </a:tc>
-                <a:tc>
-                  <a:txBody>
-                    <a:bodyPr/>
-                    <a:lstStyle/>
-                    <a:p>
-                      <a:pPr>
-                        <a:defRPr sz="1300">
-                          <a:latin typeface="Arial"/>
-                        </a:defRPr>
-                      </a:pPr>
-                      <a:r>
-                        <a:t>Add question + options</a:t>
-                      </a:r>
-                    </a:p>
-                  </a:txBody>
-                  <a:tcPr marL="91440" marR="91440" marT="45720" marB="45720">
-                    <a:solidFill>
-                      <a:srgbClr val="F1F5F9"/>
-                    </a:solidFill>
-                  </a:tcPr>
-                </a:tc>
-              </a:tr>
-              <a:tr h="320040">
-                <a:tc>
-                  <a:txBody>
-                    <a:bodyPr/>
-                    <a:lstStyle/>
-                    <a:p>
-                      <a:pPr>
-                        <a:defRPr sz="1300">
-                          <a:latin typeface="Arial"/>
-                        </a:defRPr>
-                      </a:pPr>
-                      <a:r>
-                        <a:t>POST</a:t>
-                      </a:r>
-                    </a:p>
-                  </a:txBody>
-                  <a:tcPr marL="91440" marR="91440" marT="45720" marB="45720">
-                    <a:solidFill>
-                      <a:srgbClr val="FFFFFF"/>
-                    </a:solidFill>
-                  </a:tcPr>
-                </a:tc>
-                <a:tc>
-                  <a:txBody>
-                    <a:bodyPr/>
-                    <a:lstStyle/>
-                    <a:p>
-                      <a:pPr>
-                        <a:defRPr sz="1300">
-                          <a:latin typeface="Arial"/>
-                        </a:defRPr>
-                      </a:pPr>
-                      <a:r>
-                        <a:t>/api/sessions</a:t>
-                      </a:r>
-                    </a:p>
-                  </a:txBody>
-                  <a:tcPr marL="91440" marR="91440" marT="45720" marB="45720">
-                    <a:solidFill>
-                      <a:srgbClr val="FFFFFF"/>
-                    </a:solidFill>
-                  </a:tcPr>
-                </a:tc>
-                <a:tc>
-                  <a:txBody>
-                    <a:bodyPr/>
-                    <a:lstStyle/>
-                    <a:p>
-                      <a:pPr>
-                        <a:defRPr sz="1300">
-                          <a:latin typeface="Arial"/>
-                        </a:defRPr>
-                      </a:pPr>
-                      <a:r>
-                        <a:t>Create room (organizer)</a:t>
-                      </a:r>
-                    </a:p>
-                  </a:txBody>
-                  <a:tcPr marL="91440" marR="91440" marT="45720" marB="45720">
-                    <a:solidFill>
-                      <a:srgbClr val="FFFFFF"/>
-                    </a:solidFill>
-                  </a:tcPr>
-                </a:tc>
-              </a:tr>
-              <a:tr h="320040">
-                <a:tc>
-                  <a:txBody>
-                    <a:bodyPr/>
-                    <a:lstStyle/>
-                    <a:p>
-                      <a:pPr>
-                        <a:defRPr sz="1300">
-                          <a:latin typeface="Arial"/>
-                        </a:defRPr>
-                      </a:pPr>
-                      <a:r>
-                        <a:t>POST</a:t>
-                      </a:r>
-                    </a:p>
-                  </a:txBody>
-                  <a:tcPr marL="91440" marR="91440" marT="45720" marB="45720">
-                    <a:solidFill>
-                      <a:srgbClr val="F1F5F9"/>
-                    </a:solidFill>
-                  </a:tcPr>
-                </a:tc>
-                <a:tc>
-                  <a:txBody>
-                    <a:bodyPr/>
-                    <a:lstStyle/>
-                    <a:p>
-                      <a:pPr>
-                        <a:defRPr sz="1300">
-                          <a:latin typeface="Arial"/>
-                        </a:defRPr>
-                      </a:pPr>
-                      <a:r>
-                        <a:t>/api/sessions/:code/join</a:t>
-                      </a:r>
-                    </a:p>
-                  </a:txBody>
-                  <a:tcPr marL="91440" marR="91440" marT="45720" marB="45720">
-                    <a:solidFill>
-                      <a:srgbClr val="F1F5F9"/>
-                    </a:solidFill>
-                  </a:tcPr>
-                </a:tc>
-                <a:tc>
-                  <a:txBody>
-                    <a:bodyPr/>
-                    <a:lstStyle/>
-                    <a:p>
-                      <a:pPr>
-                        <a:defRPr sz="1300">
-                          <a:latin typeface="Arial"/>
-                        </a:defRPr>
-                      </a:pPr>
-                      <a:r>
-                        <a:t>Join as participant</a:t>
-                      </a:r>
-                    </a:p>
-                  </a:txBody>
-                  <a:tcPr marL="91440" marR="91440" marT="45720" marB="45720">
-                    <a:solidFill>
-                      <a:srgbClr val="F1F5F9"/>
-                    </a:solidFill>
-                  </a:tcPr>
-                </a:tc>
-              </a:tr>
-              <a:tr h="320040">
-                <a:tc>
-                  <a:txBody>
-                    <a:bodyPr/>
-                    <a:lstStyle/>
-                    <a:p>
-                      <a:pPr>
-                        <a:defRPr sz="1300">
-                          <a:latin typeface="Arial"/>
-                        </a:defRPr>
-                      </a:pPr>
-                      <a:r>
-                        <a:t>GET</a:t>
-                      </a:r>
-                    </a:p>
-                  </a:txBody>
-                  <a:tcPr marL="91440" marR="91440" marT="45720" marB="45720">
-                    <a:solidFill>
-                      <a:srgbClr val="FFFFFF"/>
-                    </a:solidFill>
-                  </a:tcPr>
-                </a:tc>
-                <a:tc>
-                  <a:txBody>
-                    <a:bodyPr/>
-                    <a:lstStyle/>
-                    <a:p>
-                      <a:pPr>
-                        <a:defRPr sz="1300">
-                          <a:latin typeface="Arial"/>
-                        </a:defRPr>
-                      </a:pPr>
-                      <a:r>
-                        <a:t>/api/users/me/history</a:t>
-                      </a:r>
-                    </a:p>
-                  </a:txBody>
-                  <a:tcPr marL="91440" marR="91440" marT="45720" marB="45720">
-                    <a:solidFill>
-                      <a:srgbClr val="FFFFFF"/>
-                    </a:solidFill>
-                  </a:tcPr>
-                </a:tc>
-                <a:tc>
-                  <a:txBody>
-                    <a:bodyPr/>
-                    <a:lstStyle/>
-                    <a:p>
-                      <a:pPr>
-                        <a:defRPr sz="1300">
-                          <a:latin typeface="Arial"/>
-                        </a:defRPr>
-                      </a:pPr>
-                      <a:r>
-                        <a:t>Participation history</a:t>
-                      </a:r>
-                    </a:p>
-                  </a:txBody>
-                  <a:tcPr marL="91440" marR="91440" marT="45720" marB="45720">
-                    <a:solidFill>
-                      <a:srgbClr val="FFFFFF"/>
-                    </a:solidFill>
-                  </a:tcPr>
-                </a:tc>
-              </a:tr>
-            </a:tbl>
-          </a:graphicData>
-        </a:graphic>
-      </p:graphicFrame>
-      <p:sp>
-        <p:nvSpPr>
-          <p:cNvPr id="5" name="TextBox 4"/>
-          <p:cNvSpPr txBox="1"/>
-          <p:nvPr/>
-        </p:nvSpPr>
-        <p:spPr>
-          <a:xfrm>
-            <a:off x="6400800" y="1554480"/>
-            <a:ext cx="5029200" cy="457200"/>
-          </a:xfrm>
-          <a:prstGeom prst="rect">
-            <a:avLst/>
-          </a:prstGeom>
-          <a:noFill/>
-        </p:spPr>
-        <p:txBody>
-          <a:bodyPr wrap="square">
-            <a:spAutoFit/>
-          </a:bodyPr>
-          <a:lstStyle/>
-          <a:p>
-            <a:pPr algn="l">
-              <a:defRPr sz="2000" b="1">
-                <a:solidFill>
-                  <a:srgbClr val="3B82F6"/>
-                </a:solidFill>
-                <a:latin typeface="Arial"/>
-              </a:defRPr>
-            </a:pPr>
-            <a:r>
-              <a:t>WebSocket — 11 Events</a:t>
-            </a:r>
-          </a:p>
-        </p:txBody>
-      </p:sp>
-      <p:graphicFrame>
-        <p:nvGraphicFramePr>
-          <p:cNvPr id="6" name="Table 5"/>
-          <p:cNvGraphicFramePr>
-            <a:graphicFrameLocks noGrp="1"/>
-          </p:cNvGraphicFramePr>
-          <p:nvPr/>
-        </p:nvGraphicFramePr>
-        <p:xfrm>
-          <a:off x="6400800" y="2103120"/>
-          <a:ext cx="5303520" cy="2880360"/>
-        </p:xfrm>
-        <a:graphic>
-          <a:graphicData uri="http://schemas.openxmlformats.org/drawingml/2006/table">
-            <a:tbl>
-              <a:tblPr firstRow="1" bandRow="1">
-                <a:tableStyleId>{5C22544A-7EE6-4342-B048-85BDC9FD1C3A}</a:tableStyleId>
-              </a:tblPr>
-              <a:tblGrid>
-                <a:gridCol w="2011680"/>
-                <a:gridCol w="1645920"/>
-                <a:gridCol w="1645920"/>
-              </a:tblGrid>
-              <a:tr h="320040">
-                <a:tc>
-                  <a:txBody>
-                    <a:bodyPr/>
-                    <a:lstStyle/>
-                    <a:p>
-                      <a:pPr>
-                        <a:defRPr sz="1200" b="1">
-                          <a:solidFill>
-                            <a:srgbClr val="FFFFFF"/>
-                          </a:solidFill>
-                          <a:latin typeface="Arial"/>
-                        </a:defRPr>
-                      </a:pPr>
-                      <a:r>
-                        <a:t>Event</a:t>
-                      </a:r>
-                    </a:p>
-                  </a:txBody>
-                  <a:tcPr marL="91440" marR="91440" marT="45720" marB="45720">
-                    <a:solidFill>
-                      <a:srgbClr val="1D4ED8"/>
-                    </a:solidFill>
-                  </a:tcPr>
-                </a:tc>
-                <a:tc>
-                  <a:txBody>
-                    <a:bodyPr/>
-                    <a:lstStyle/>
-                    <a:p>
-                      <a:pPr>
-                        <a:defRPr sz="1200" b="1">
-                          <a:solidFill>
-                            <a:srgbClr val="FFFFFF"/>
-                          </a:solidFill>
-                          <a:latin typeface="Arial"/>
-                        </a:defRPr>
-                      </a:pPr>
-                      <a:r>
-                        <a:t>Direction</a:t>
-                      </a:r>
-                    </a:p>
-                  </a:txBody>
-                  <a:tcPr marL="91440" marR="91440" marT="45720" marB="45720">
-                    <a:solidFill>
-                      <a:srgbClr val="1D4ED8"/>
-                    </a:solidFill>
-                  </a:tcPr>
-                </a:tc>
-                <a:tc>
-                  <a:txBody>
-                    <a:bodyPr/>
-                    <a:lstStyle/>
-                    <a:p>
-                      <a:pPr>
-                        <a:defRPr sz="1200" b="1">
-                          <a:solidFill>
-                            <a:srgbClr val="FFFFFF"/>
-                          </a:solidFill>
-                          <a:latin typeface="Arial"/>
-                        </a:defRPr>
-                      </a:pPr>
-                      <a:r>
-                        <a:t>Purpose</a:t>
-                      </a:r>
-                    </a:p>
-                  </a:txBody>
-                  <a:tcPr marL="91440" marR="91440" marT="45720" marB="45720">
-                    <a:solidFill>
-                      <a:srgbClr val="1D4ED8"/>
-                    </a:solidFill>
-                  </a:tcPr>
-                </a:tc>
-              </a:tr>
-              <a:tr h="320040">
-                <a:tc>
-                  <a:txBody>
-                    <a:bodyPr/>
-                    <a:lstStyle/>
-                    <a:p>
-                      <a:pPr>
-                        <a:defRPr sz="1300">
-                          <a:latin typeface="Arial"/>
-                        </a:defRPr>
-                      </a:pPr>
-                      <a:r>
-                        <a:t>session:start</a:t>
-                      </a:r>
-                    </a:p>
-                  </a:txBody>
-                  <a:tcPr marL="91440" marR="91440" marT="45720" marB="45720">
-                    <a:solidFill>
-                      <a:srgbClr val="FFFFFF"/>
-                    </a:solidFill>
-                  </a:tcPr>
-                </a:tc>
-                <a:tc>
-                  <a:txBody>
-                    <a:bodyPr/>
-                    <a:lstStyle/>
-                    <a:p>
-                      <a:pPr>
-                        <a:defRPr sz="1300">
-                          <a:latin typeface="Arial"/>
-                        </a:defRPr>
-                      </a:pPr>
-                      <a:r>
-                        <a:t>Org → Server</a:t>
-                      </a:r>
-                    </a:p>
-                  </a:txBody>
-                  <a:tcPr marL="91440" marR="91440" marT="45720" marB="45720">
-                    <a:solidFill>
-                      <a:srgbClr val="FFFFFF"/>
-                    </a:solidFill>
-                  </a:tcPr>
-                </a:tc>
-                <a:tc>
-                  <a:txBody>
-                    <a:bodyPr/>
-                    <a:lstStyle/>
-                    <a:p>
-                      <a:pPr>
-                        <a:defRPr sz="1300">
-                          <a:latin typeface="Arial"/>
-                        </a:defRPr>
-                      </a:pPr>
-                      <a:r>
-                        <a:t>Begin quiz</a:t>
-                      </a:r>
-                    </a:p>
-                  </a:txBody>
-                  <a:tcPr marL="91440" marR="91440" marT="45720" marB="45720">
-                    <a:solidFill>
-                      <a:srgbClr val="FFFFFF"/>
-                    </a:solidFill>
-                  </a:tcPr>
-                </a:tc>
-              </a:tr>
-              <a:tr h="320040">
-                <a:tc>
-                  <a:txBody>
-                    <a:bodyPr/>
-                    <a:lstStyle/>
-                    <a:p>
-                      <a:pPr>
-                        <a:defRPr sz="1300">
-                          <a:latin typeface="Arial"/>
-                        </a:defRPr>
-                      </a:pPr>
-                      <a:r>
-                        <a:t>question:show</a:t>
-                      </a:r>
-                    </a:p>
-                  </a:txBody>
-                  <a:tcPr marL="91440" marR="91440" marT="45720" marB="45720">
-                    <a:solidFill>
-                      <a:srgbClr val="F1F5F9"/>
-                    </a:solidFill>
-                  </a:tcPr>
-                </a:tc>
-                <a:tc>
-                  <a:txBody>
-                    <a:bodyPr/>
-                    <a:lstStyle/>
-                    <a:p>
-                      <a:pPr>
-                        <a:defRPr sz="1300">
-                          <a:latin typeface="Arial"/>
-                        </a:defRPr>
-                      </a:pPr>
-                      <a:r>
-                        <a:t>Server → All</a:t>
-                      </a:r>
-                    </a:p>
-                  </a:txBody>
-                  <a:tcPr marL="91440" marR="91440" marT="45720" marB="45720">
-                    <a:solidFill>
-                      <a:srgbClr val="F1F5F9"/>
-                    </a:solidFill>
-                  </a:tcPr>
-                </a:tc>
-                <a:tc>
-                  <a:txBody>
-                    <a:bodyPr/>
-                    <a:lstStyle/>
-                    <a:p>
-                      <a:pPr>
-                        <a:defRPr sz="1300">
-                          <a:latin typeface="Arial"/>
-                        </a:defRPr>
-                      </a:pPr>
-                      <a:r>
-                        <a:t>Push question + timer</a:t>
-                      </a:r>
-                    </a:p>
-                  </a:txBody>
-                  <a:tcPr marL="91440" marR="91440" marT="45720" marB="45720">
-                    <a:solidFill>
-                      <a:srgbClr val="F1F5F9"/>
-                    </a:solidFill>
-                  </a:tcPr>
-                </a:tc>
-              </a:tr>
-              <a:tr h="320040">
-                <a:tc>
-                  <a:txBody>
-                    <a:bodyPr/>
-                    <a:lstStyle/>
-                    <a:p>
-                      <a:pPr>
-                        <a:defRPr sz="1300">
-                          <a:latin typeface="Arial"/>
-                        </a:defRPr>
-                      </a:pPr>
-                      <a:r>
-                        <a:t>answer:submit</a:t>
-                      </a:r>
-                    </a:p>
-                  </a:txBody>
-                  <a:tcPr marL="91440" marR="91440" marT="45720" marB="45720">
-                    <a:solidFill>
-                      <a:srgbClr val="FFFFFF"/>
-                    </a:solidFill>
-                  </a:tcPr>
-                </a:tc>
-                <a:tc>
-                  <a:txBody>
-                    <a:bodyPr/>
-                    <a:lstStyle/>
-                    <a:p>
-                      <a:pPr>
-                        <a:defRPr sz="1300">
-                          <a:latin typeface="Arial"/>
-                        </a:defRPr>
-                      </a:pPr>
-                      <a:r>
-                        <a:t>Player → Server</a:t>
-                      </a:r>
-                    </a:p>
-                  </a:txBody>
-                  <a:tcPr marL="91440" marR="91440" marT="45720" marB="45720">
-                    <a:solidFill>
-                      <a:srgbClr val="FFFFFF"/>
-                    </a:solidFill>
-                  </a:tcPr>
-                </a:tc>
-                <a:tc>
-                  <a:txBody>
-                    <a:bodyPr/>
-                    <a:lstStyle/>
-                    <a:p>
-                      <a:pPr>
-                        <a:defRPr sz="1300">
-                          <a:latin typeface="Arial"/>
-                        </a:defRPr>
-                      </a:pPr>
-                      <a:r>
-                        <a:t>Submit response</a:t>
-                      </a:r>
-                    </a:p>
-                  </a:txBody>
-                  <a:tcPr marL="91440" marR="91440" marT="45720" marB="45720">
-                    <a:solidFill>
-                      <a:srgbClr val="FFFFFF"/>
-                    </a:solidFill>
-                  </a:tcPr>
-                </a:tc>
-              </a:tr>
-              <a:tr h="320040">
-                <a:tc>
-                  <a:txBody>
-                    <a:bodyPr/>
-                    <a:lstStyle/>
-                    <a:p>
-                      <a:pPr>
-                        <a:defRPr sz="1300">
-                          <a:latin typeface="Arial"/>
-                        </a:defRPr>
-                      </a:pPr>
-                      <a:r>
-                        <a:t>question:closed</a:t>
-                      </a:r>
-                    </a:p>
-                  </a:txBody>
-                  <a:tcPr marL="91440" marR="91440" marT="45720" marB="45720">
-                    <a:solidFill>
-                      <a:srgbClr val="F1F5F9"/>
-                    </a:solidFill>
-                  </a:tcPr>
-                </a:tc>
-                <a:tc>
-                  <a:txBody>
-                    <a:bodyPr/>
-                    <a:lstStyle/>
-                    <a:p>
-                      <a:pPr>
-                        <a:defRPr sz="1300">
-                          <a:latin typeface="Arial"/>
-                        </a:defRPr>
-                      </a:pPr>
-                      <a:r>
-                        <a:t>Server → All</a:t>
-                      </a:r>
-                    </a:p>
-                  </a:txBody>
-                  <a:tcPr marL="91440" marR="91440" marT="45720" marB="45720">
-                    <a:solidFill>
-                      <a:srgbClr val="F1F5F9"/>
-                    </a:solidFill>
-                  </a:tcPr>
-                </a:tc>
-                <a:tc>
-                  <a:txBody>
-                    <a:bodyPr/>
-                    <a:lstStyle/>
-                    <a:p>
-                      <a:pPr>
-                        <a:defRPr sz="1300">
-                          <a:latin typeface="Arial"/>
-                        </a:defRPr>
-                      </a:pPr>
-                      <a:r>
-                        <a:t>Timeout / next</a:t>
-                      </a:r>
-                    </a:p>
-                  </a:txBody>
-                  <a:tcPr marL="91440" marR="91440" marT="45720" marB="45720">
-                    <a:solidFill>
-                      <a:srgbClr val="F1F5F9"/>
-                    </a:solidFill>
-                  </a:tcPr>
-                </a:tc>
-              </a:tr>
-              <a:tr h="320040">
-                <a:tc>
-                  <a:txBody>
-                    <a:bodyPr/>
-                    <a:lstStyle/>
-                    <a:p>
-                      <a:pPr>
-                        <a:defRPr sz="1300">
-                          <a:latin typeface="Arial"/>
-                        </a:defRPr>
-                      </a:pPr>
-                      <a:r>
-                        <a:t>quiz:leaderboard</a:t>
-                      </a:r>
-                    </a:p>
-                  </a:txBody>
-                  <a:tcPr marL="91440" marR="91440" marT="45720" marB="45720">
-                    <a:solidFill>
-                      <a:srgbClr val="FFFFFF"/>
-                    </a:solidFill>
-                  </a:tcPr>
-                </a:tc>
-                <a:tc>
-                  <a:txBody>
-                    <a:bodyPr/>
-                    <a:lstStyle/>
-                    <a:p>
-                      <a:pPr>
-                        <a:defRPr sz="1300">
-                          <a:latin typeface="Arial"/>
-                        </a:defRPr>
-                      </a:pPr>
-                      <a:r>
-                        <a:t>Server → All</a:t>
-                      </a:r>
-                    </a:p>
-                  </a:txBody>
-                  <a:tcPr marL="91440" marR="91440" marT="45720" marB="45720">
-                    <a:solidFill>
-                      <a:srgbClr val="FFFFFF"/>
-                    </a:solidFill>
-                  </a:tcPr>
-                </a:tc>
-                <a:tc>
-                  <a:txBody>
-                    <a:bodyPr/>
-                    <a:lstStyle/>
-                    <a:p>
-                      <a:pPr>
-                        <a:defRPr sz="1300">
-                          <a:latin typeface="Arial"/>
-                        </a:defRPr>
-                      </a:pPr>
-                      <a:r>
-                        <a:t>Live rankings</a:t>
-                      </a:r>
-                    </a:p>
-                  </a:txBody>
-                  <a:tcPr marL="91440" marR="91440" marT="45720" marB="45720">
-                    <a:solidFill>
-                      <a:srgbClr val="FFFFFF"/>
-                    </a:solidFill>
-                  </a:tcPr>
-                </a:tc>
-              </a:tr>
-              <a:tr h="320040">
-                <a:tc>
-                  <a:txBody>
-                    <a:bodyPr/>
-                    <a:lstStyle/>
-                    <a:p>
-                      <a:pPr>
-                        <a:defRPr sz="1300">
-                          <a:latin typeface="Arial"/>
-                        </a:defRPr>
-                      </a:pPr>
-                      <a:r>
-                        <a:t>quiz:finished</a:t>
-                      </a:r>
-                    </a:p>
-                  </a:txBody>
-                  <a:tcPr marL="91440" marR="91440" marT="45720" marB="45720">
-                    <a:solidFill>
-                      <a:srgbClr val="F1F5F9"/>
-                    </a:solidFill>
-                  </a:tcPr>
-                </a:tc>
-                <a:tc>
-                  <a:txBody>
-                    <a:bodyPr/>
-                    <a:lstStyle/>
-                    <a:p>
-                      <a:pPr>
-                        <a:defRPr sz="1300">
-                          <a:latin typeface="Arial"/>
-                        </a:defRPr>
-                      </a:pPr>
-                      <a:r>
-                        <a:t>Server → All</a:t>
-                      </a:r>
-                    </a:p>
-                  </a:txBody>
-                  <a:tcPr marL="91440" marR="91440" marT="45720" marB="45720">
-                    <a:solidFill>
-                      <a:srgbClr val="F1F5F9"/>
-                    </a:solidFill>
-                  </a:tcPr>
-                </a:tc>
-                <a:tc>
-                  <a:txBody>
-                    <a:bodyPr/>
-                    <a:lstStyle/>
-                    <a:p>
-                      <a:pPr>
-                        <a:defRPr sz="1300">
-                          <a:latin typeface="Arial"/>
-                        </a:defRPr>
-                      </a:pPr>
-                      <a:r>
-                        <a:t>Final results</a:t>
-                      </a:r>
-                    </a:p>
-                  </a:txBody>
-                  <a:tcPr marL="91440" marR="91440" marT="45720" marB="45720">
-                    <a:solidFill>
-                      <a:srgbClr val="F1F5F9"/>
-                    </a:solidFill>
-                  </a:tcPr>
-                </a:tc>
-              </a:tr>
-              <a:tr h="320040">
-                <a:tc>
-                  <a:txBody>
-                    <a:bodyPr/>
-                    <a:lstStyle/>
-                    <a:p>
-                      <a:pPr>
-                        <a:defRPr sz="1300">
-                          <a:latin typeface="Arial"/>
-                        </a:defRPr>
-                      </a:pPr>
-                      <a:r>
-                        <a:t>organizer:stats</a:t>
-                      </a:r>
-                    </a:p>
-                  </a:txBody>
-                  <a:tcPr marL="91440" marR="91440" marT="45720" marB="45720">
-                    <a:solidFill>
-                      <a:srgbClr val="FFFFFF"/>
-                    </a:solidFill>
-                  </a:tcPr>
-                </a:tc>
-                <a:tc>
-                  <a:txBody>
-                    <a:bodyPr/>
-                    <a:lstStyle/>
-                    <a:p>
-                      <a:pPr>
-                        <a:defRPr sz="1300">
-                          <a:latin typeface="Arial"/>
-                        </a:defRPr>
-                      </a:pPr>
-                      <a:r>
-                        <a:t>Server → Org</a:t>
-                      </a:r>
-                    </a:p>
-                  </a:txBody>
-                  <a:tcPr marL="91440" marR="91440" marT="45720" marB="45720">
-                    <a:solidFill>
-                      <a:srgbClr val="FFFFFF"/>
-                    </a:solidFill>
-                  </a:tcPr>
-                </a:tc>
-                <a:tc>
-                  <a:txBody>
-                    <a:bodyPr/>
-                    <a:lstStyle/>
-                    <a:p>
-                      <a:pPr>
-                        <a:defRPr sz="1300">
-                          <a:latin typeface="Arial"/>
-                        </a:defRPr>
-                      </a:pPr>
-                      <a:r>
-                        <a:t>Live answer counts</a:t>
-                      </a:r>
-                    </a:p>
-                  </a:txBody>
-                  <a:tcPr marL="91440" marR="91440" marT="45720" marB="45720">
-                    <a:solidFill>
-                      <a:srgbClr val="FFFFFF"/>
-                    </a:solidFill>
-                  </a:tcPr>
-                </a:tc>
-              </a:tr>
-              <a:tr h="320040">
-                <a:tc>
-                  <a:txBody>
-                    <a:bodyPr/>
-                    <a:lstStyle/>
-                    <a:p>
-                      <a:pPr>
-                        <a:defRPr sz="1300">
-                          <a:latin typeface="Arial"/>
-                        </a:defRPr>
-                      </a:pPr>
-                      <a:r>
-                        <a:t>answer:result</a:t>
-                      </a:r>
-                    </a:p>
-                  </a:txBody>
-                  <a:tcPr marL="91440" marR="91440" marT="45720" marB="45720">
-                    <a:solidFill>
-                      <a:srgbClr val="F1F5F9"/>
-                    </a:solidFill>
-                  </a:tcPr>
-                </a:tc>
-                <a:tc>
-                  <a:txBody>
-                    <a:bodyPr/>
-                    <a:lstStyle/>
-                    <a:p>
-                      <a:pPr>
-                        <a:defRPr sz="1300">
-                          <a:latin typeface="Arial"/>
-                        </a:defRPr>
-                      </a:pPr>
-                      <a:r>
-                        <a:t>Server → Player</a:t>
-                      </a:r>
-                    </a:p>
-                  </a:txBody>
-                  <a:tcPr marL="91440" marR="91440" marT="45720" marB="45720">
-                    <a:solidFill>
-                      <a:srgbClr val="F1F5F9"/>
-                    </a:solidFill>
-                  </a:tcPr>
-                </a:tc>
-                <a:tc>
-                  <a:txBody>
-                    <a:bodyPr/>
-                    <a:lstStyle/>
-                    <a:p>
-                      <a:pPr>
-                        <a:defRPr sz="1300">
-                          <a:latin typeface="Arial"/>
-                        </a:defRPr>
-                      </a:pPr>
-                      <a:r>
-                        <a:t>Per-player feedback</a:t>
-                      </a:r>
-                    </a:p>
-                  </a:txBody>
-                  <a:tcPr marL="91440" marR="91440" marT="45720" marB="45720">
-                    <a:solidFill>
-                      <a:srgbClr val="F1F5F9"/>
-                    </a:solidFill>
-                  </a:tcPr>
-                </a:tc>
-              </a:tr>
-            </a:tbl>
-          </a:graphicData>
-        </a:graphic>
-      </p:graphicFrame>
-      <p:sp>
-        <p:nvSpPr>
-          <p:cNvPr id="7" name="Rounded Rectangle 6"/>
-          <p:cNvSpPr/>
-          <p:nvPr/>
-        </p:nvSpPr>
-        <p:spPr>
-          <a:xfrm>
-            <a:off x="640080" y="5120640"/>
-            <a:ext cx="10881360" cy="914400"/>
-          </a:xfrm>
-          <a:prstGeom prst="roundRect">
-            <a:avLst/>
-          </a:prstGeom>
-          <a:solidFill>
-            <a:srgbClr val="EFF6FF"/>
-          </a:solidFill>
-          <a:ln>
-            <a:noFill/>
-          </a:ln>
-        </p:spPr>
-        <p:style>
-          <a:lnRef idx="1">
-            <a:schemeClr val="accent1"/>
-          </a:lnRef>
-          <a:fillRef idx="3">
-            <a:schemeClr val="accent1"/>
-          </a:fillRef>
-          <a:effectRef idx="2">
-            <a:schemeClr val="accent1"/>
-          </a:effectRef>
-          <a:fontRef idx="minor">
-            <a:schemeClr val="lt1"/>
-          </a:fontRef>
-        </p:style>
-        <p:txBody>
-          <a:bodyPr rtlCol="0" anchor="ctr" wrap="square" lIns="274320" tIns="137160"/>
-          <a:lstStyle/>
-          <a:p>
-            <a:pPr algn="ctr">
-              <a:defRPr sz="1400">
-                <a:solidFill>
-                  <a:srgbClr val="1E293B"/>
-                </a:solidFill>
-                <a:latin typeface="Arial"/>
-              </a:defRPr>
-            </a:pPr>
-            <a:r>
-              <a:t>Server-enforced: Late answers rejected. Timer managed server-side. One answer per participant per question. Room-code-scoped socket rooms.</a:t>
-            </a:r>
-          </a:p>
-        </p:txBody>
-      </p:sp>
-      <p:sp>
-        <p:nvSpPr>
-          <p:cNvPr id="8" name="TextBox 7"/>
-          <p:cNvSpPr txBox="1"/>
-          <p:nvPr/>
-        </p:nvSpPr>
-        <p:spPr>
-          <a:xfrm>
-            <a:off x="11064240" y="6400800"/>
-            <a:ext cx="914400" cy="365760"/>
-          </a:xfrm>
-          <a:prstGeom prst="rect">
-            <a:avLst/>
-          </a:prstGeom>
-          <a:noFill/>
-        </p:spPr>
-        <p:txBody>
-          <a:bodyPr wrap="square">
-            <a:spAutoFit/>
-          </a:bodyPr>
-          <a:lstStyle/>
-          <a:p>
-            <a:pPr algn="r">
-              <a:defRPr sz="1100" b="0">
-                <a:solidFill>
-                  <a:srgbClr val="64748B"/>
-                </a:solidFill>
-                <a:latin typeface="Arial"/>
-              </a:defRPr>
-            </a:pPr>
-            <a:r>
-              <a:t>6 / 9</a:t>
-            </a:r>
-          </a:p>
-        </p:txBody>
-      </p:sp>
-    </p:spTree>
-  </p:cSld>
-  <p:clrMapOvr>
-    <a:masterClrMapping/>
-  </p:clrMapOvr>
-</p:sld>
-</file>
-
-<file path=ppt/slides/slide7.xml><?xml version="1.0" encoding="utf-8"?>
-<p:sld xmlns:a="http://schemas.openxmlformats.org/drawingml/2006/main" xmlns:p="http://schemas.openxmlformats.org/presentationml/2006/main" xmlns:r="http://schemas.openxmlformats.org/officeDocument/2006/relationships">
+<file path=ppt/slides/slide5.xml><?xml version="1.0" encoding="utf-8"?>
+<p:sld xmlns:a="http://schemas.openxmlformats.org/drawingml/2006/main" xmlns:r="http://schemas.openxmlformats.org/officeDocument/2006/relationships" xmlns:p="http://schemas.openxmlformats.org/presentationml/2006/main">
   <p:cSld>
     <p:bg>
       <p:bgPr>
@@ -7858,7 +5482,14 @@
         <p:cNvGrpSpPr/>
         <p:nvPr/>
       </p:nvGrpSpPr>
-      <p:grpSpPr/>
+      <p:grpSpPr>
+        <a:xfrm>
+          <a:off x="0" y="0"/>
+          <a:ext cx="0" cy="0"/>
+          <a:chOff x="0" y="0"/>
+          <a:chExt cx="0" cy="0"/>
+        </a:xfrm>
+      </p:grpSpPr>
       <p:sp>
         <p:nvSpPr>
           <p:cNvPr id="2" name="TextBox 1"/>
@@ -7931,7 +5562,7 @@
           </a:fontRef>
         </p:style>
         <p:txBody>
-          <a:bodyPr rtlCol="0" anchor="ctr" wrap="square" lIns="182880" rIns="182880" tIns="137160" bIns="137160"/>
+          <a:bodyPr wrap="square" lIns="182880" tIns="137160" rIns="182880" bIns="137160" rtlCol="0" anchor="ctr"/>
           <a:lstStyle/>
           <a:p>
             <a:pPr algn="ctr">
@@ -8060,7 +5691,7 @@
           </a:fontRef>
         </p:style>
         <p:txBody>
-          <a:bodyPr rtlCol="0" anchor="ctr" wrap="square" lIns="182880" rIns="182880" tIns="137160" bIns="137160"/>
+          <a:bodyPr wrap="square" lIns="182880" tIns="137160" rIns="182880" bIns="137160" rtlCol="0" anchor="ctr"/>
           <a:lstStyle/>
           <a:p>
             <a:pPr algn="ctr">
@@ -8189,7 +5820,7 @@
           </a:fontRef>
         </p:style>
         <p:txBody>
-          <a:bodyPr rtlCol="0" anchor="ctr" wrap="square" lIns="182880" rIns="182880" tIns="137160" bIns="137160"/>
+          <a:bodyPr wrap="square" lIns="182880" tIns="137160" rIns="182880" bIns="137160" rtlCol="0" anchor="ctr"/>
           <a:lstStyle/>
           <a:p>
             <a:pPr algn="ctr">
@@ -8318,7 +5949,7 @@
           </a:fontRef>
         </p:style>
         <p:txBody>
-          <a:bodyPr rtlCol="0" anchor="ctr" wrap="square" lIns="182880" rIns="182880" tIns="137160" bIns="137160"/>
+          <a:bodyPr wrap="square" lIns="182880" tIns="137160" rIns="182880" bIns="137160" rtlCol="0" anchor="ctr"/>
           <a:lstStyle/>
           <a:p>
             <a:pPr algn="ctr">
@@ -8447,7 +6078,7 @@
           </a:fontRef>
         </p:style>
         <p:txBody>
-          <a:bodyPr rtlCol="0" anchor="ctr" lIns="274320"/>
+          <a:bodyPr lIns="274320" rtlCol="0" anchor="ctr"/>
           <a:lstStyle/>
           <a:p>
             <a:pPr algn="ctr">
@@ -8496,1296 +6127,6 @@
             </a:pPr>
             <a:r>
               <a:t>7 / 9</a:t>
-            </a:r>
-          </a:p>
-        </p:txBody>
-      </p:sp>
-    </p:spTree>
-  </p:cSld>
-  <p:clrMapOvr>
-    <a:masterClrMapping/>
-  </p:clrMapOvr>
-</p:sld>
-</file>
-
-<file path=ppt/slides/slide8.xml><?xml version="1.0" encoding="utf-8"?>
-<p:sld xmlns:a="http://schemas.openxmlformats.org/drawingml/2006/main" xmlns:p="http://schemas.openxmlformats.org/presentationml/2006/main" xmlns:r="http://schemas.openxmlformats.org/officeDocument/2006/relationships">
-  <p:cSld>
-    <p:bg>
-      <p:bgPr>
-        <a:solidFill>
-          <a:srgbClr val="7E22CE"/>
-        </a:solidFill>
-        <a:effectLst/>
-      </p:bgPr>
-    </p:bg>
-    <p:spTree>
-      <p:nvGrpSpPr>
-        <p:cNvPr id="1" name=""/>
-        <p:cNvGrpSpPr/>
-        <p:nvPr/>
-      </p:nvGrpSpPr>
-      <p:grpSpPr/>
-      <p:sp>
-        <p:nvSpPr>
-          <p:cNvPr id="2" name="TextBox 1"/>
-          <p:cNvSpPr txBox="1"/>
-          <p:nvPr/>
-        </p:nvSpPr>
-        <p:spPr>
-          <a:xfrm>
-            <a:off x="640080" y="457200"/>
-            <a:ext cx="10058400" cy="640080"/>
-          </a:xfrm>
-          <a:prstGeom prst="rect">
-            <a:avLst/>
-          </a:prstGeom>
-          <a:noFill/>
-        </p:spPr>
-        <p:txBody>
-          <a:bodyPr wrap="square">
-            <a:spAutoFit/>
-          </a:bodyPr>
-          <a:lstStyle/>
-          <a:p>
-            <a:pPr algn="l">
-              <a:defRPr sz="3600" b="1">
-                <a:solidFill>
-                  <a:srgbClr val="FFFFFF"/>
-                </a:solidFill>
-                <a:latin typeface="Arial"/>
-              </a:defRPr>
-            </a:pPr>
-            <a:r>
-              <a:t>Project Metrics</a:t>
-            </a:r>
-          </a:p>
-        </p:txBody>
-      </p:sp>
-      <p:sp>
-        <p:nvSpPr>
-          <p:cNvPr id="3" name="TextBox 2"/>
-          <p:cNvSpPr txBox="1"/>
-          <p:nvPr/>
-        </p:nvSpPr>
-        <p:spPr>
-          <a:xfrm>
-            <a:off x="640080" y="2286000"/>
-            <a:ext cx="2011680" cy="914400"/>
-          </a:xfrm>
-          <a:prstGeom prst="rect">
-            <a:avLst/>
-          </a:prstGeom>
-          <a:noFill/>
-        </p:spPr>
-        <p:txBody>
-          <a:bodyPr wrap="square">
-            <a:spAutoFit/>
-          </a:bodyPr>
-          <a:lstStyle/>
-          <a:p>
-            <a:pPr algn="ctr">
-              <a:defRPr sz="4800" b="1">
-                <a:solidFill>
-                  <a:srgbClr val="FFFFFF"/>
-                </a:solidFill>
-                <a:latin typeface="Arial"/>
-              </a:defRPr>
-            </a:pPr>
-            <a:r>
-              <a:t>39</a:t>
-            </a:r>
-          </a:p>
-        </p:txBody>
-      </p:sp>
-      <p:sp>
-        <p:nvSpPr>
-          <p:cNvPr id="4" name="TextBox 3"/>
-          <p:cNvSpPr txBox="1"/>
-          <p:nvPr/>
-        </p:nvSpPr>
-        <p:spPr>
-          <a:xfrm>
-            <a:off x="640080" y="3200400"/>
-            <a:ext cx="2011680" cy="365760"/>
-          </a:xfrm>
-          <a:prstGeom prst="rect">
-            <a:avLst/>
-          </a:prstGeom>
-          <a:noFill/>
-        </p:spPr>
-        <p:txBody>
-          <a:bodyPr wrap="square">
-            <a:spAutoFit/>
-          </a:bodyPr>
-          <a:lstStyle/>
-          <a:p>
-            <a:pPr algn="ctr">
-              <a:defRPr sz="1400" b="0">
-                <a:solidFill>
-                  <a:srgbClr val="CCCCEE"/>
-                </a:solidFill>
-                <a:latin typeface="Arial"/>
-              </a:defRPr>
-            </a:pPr>
-            <a:r>
-              <a:t>Source Files</a:t>
-            </a:r>
-          </a:p>
-        </p:txBody>
-      </p:sp>
-      <p:sp>
-        <p:nvSpPr>
-          <p:cNvPr id="5" name="TextBox 4"/>
-          <p:cNvSpPr txBox="1"/>
-          <p:nvPr/>
-        </p:nvSpPr>
-        <p:spPr>
-          <a:xfrm>
-            <a:off x="2880360" y="2286000"/>
-            <a:ext cx="2011680" cy="914400"/>
-          </a:xfrm>
-          <a:prstGeom prst="rect">
-            <a:avLst/>
-          </a:prstGeom>
-          <a:noFill/>
-        </p:spPr>
-        <p:txBody>
-          <a:bodyPr wrap="square">
-            <a:spAutoFit/>
-          </a:bodyPr>
-          <a:lstStyle/>
-          <a:p>
-            <a:pPr algn="ctr">
-              <a:defRPr sz="4800" b="1">
-                <a:solidFill>
-                  <a:srgbClr val="FFFFFF"/>
-                </a:solidFill>
-                <a:latin typeface="Arial"/>
-              </a:defRPr>
-            </a:pPr>
-            <a:r>
-              <a:t>~4,500</a:t>
-            </a:r>
-          </a:p>
-        </p:txBody>
-      </p:sp>
-      <p:sp>
-        <p:nvSpPr>
-          <p:cNvPr id="6" name="TextBox 5"/>
-          <p:cNvSpPr txBox="1"/>
-          <p:nvPr/>
-        </p:nvSpPr>
-        <p:spPr>
-          <a:xfrm>
-            <a:off x="2880360" y="3200400"/>
-            <a:ext cx="2011680" cy="365760"/>
-          </a:xfrm>
-          <a:prstGeom prst="rect">
-            <a:avLst/>
-          </a:prstGeom>
-          <a:noFill/>
-        </p:spPr>
-        <p:txBody>
-          <a:bodyPr wrap="square">
-            <a:spAutoFit/>
-          </a:bodyPr>
-          <a:lstStyle/>
-          <a:p>
-            <a:pPr algn="ctr">
-              <a:defRPr sz="1400" b="0">
-                <a:solidFill>
-                  <a:srgbClr val="CCCCEE"/>
-                </a:solidFill>
-                <a:latin typeface="Arial"/>
-              </a:defRPr>
-            </a:pPr>
-            <a:r>
-              <a:t>Lines of Code</a:t>
-            </a:r>
-          </a:p>
-        </p:txBody>
-      </p:sp>
-      <p:sp>
-        <p:nvSpPr>
-          <p:cNvPr id="7" name="TextBox 6"/>
-          <p:cNvSpPr txBox="1"/>
-          <p:nvPr/>
-        </p:nvSpPr>
-        <p:spPr>
-          <a:xfrm>
-            <a:off x="5120640" y="2286000"/>
-            <a:ext cx="2011680" cy="914400"/>
-          </a:xfrm>
-          <a:prstGeom prst="rect">
-            <a:avLst/>
-          </a:prstGeom>
-          <a:noFill/>
-        </p:spPr>
-        <p:txBody>
-          <a:bodyPr wrap="square">
-            <a:spAutoFit/>
-          </a:bodyPr>
-          <a:lstStyle/>
-          <a:p>
-            <a:pPr algn="ctr">
-              <a:defRPr sz="4800" b="1">
-                <a:solidFill>
-                  <a:srgbClr val="FFFFFF"/>
-                </a:solidFill>
-                <a:latin typeface="Arial"/>
-              </a:defRPr>
-            </a:pPr>
-            <a:r>
-              <a:t>14</a:t>
-            </a:r>
-          </a:p>
-        </p:txBody>
-      </p:sp>
-      <p:sp>
-        <p:nvSpPr>
-          <p:cNvPr id="8" name="TextBox 7"/>
-          <p:cNvSpPr txBox="1"/>
-          <p:nvPr/>
-        </p:nvSpPr>
-        <p:spPr>
-          <a:xfrm>
-            <a:off x="5120640" y="3200400"/>
-            <a:ext cx="2011680" cy="365760"/>
-          </a:xfrm>
-          <a:prstGeom prst="rect">
-            <a:avLst/>
-          </a:prstGeom>
-          <a:noFill/>
-        </p:spPr>
-        <p:txBody>
-          <a:bodyPr wrap="square">
-            <a:spAutoFit/>
-          </a:bodyPr>
-          <a:lstStyle/>
-          <a:p>
-            <a:pPr algn="ctr">
-              <a:defRPr sz="1400" b="0">
-                <a:solidFill>
-                  <a:srgbClr val="CCCCEE"/>
-                </a:solidFill>
-                <a:latin typeface="Arial"/>
-              </a:defRPr>
-            </a:pPr>
-            <a:r>
-              <a:t>API Endpoints</a:t>
-            </a:r>
-          </a:p>
-        </p:txBody>
-      </p:sp>
-      <p:sp>
-        <p:nvSpPr>
-          <p:cNvPr id="9" name="TextBox 8"/>
-          <p:cNvSpPr txBox="1"/>
-          <p:nvPr/>
-        </p:nvSpPr>
-        <p:spPr>
-          <a:xfrm>
-            <a:off x="7360920" y="2286000"/>
-            <a:ext cx="2011680" cy="914400"/>
-          </a:xfrm>
-          <a:prstGeom prst="rect">
-            <a:avLst/>
-          </a:prstGeom>
-          <a:noFill/>
-        </p:spPr>
-        <p:txBody>
-          <a:bodyPr wrap="square">
-            <a:spAutoFit/>
-          </a:bodyPr>
-          <a:lstStyle/>
-          <a:p>
-            <a:pPr algn="ctr">
-              <a:defRPr sz="4800" b="1">
-                <a:solidFill>
-                  <a:srgbClr val="FFFFFF"/>
-                </a:solidFill>
-                <a:latin typeface="Arial"/>
-              </a:defRPr>
-            </a:pPr>
-            <a:r>
-              <a:t>11</a:t>
-            </a:r>
-          </a:p>
-        </p:txBody>
-      </p:sp>
-      <p:sp>
-        <p:nvSpPr>
-          <p:cNvPr id="10" name="TextBox 9"/>
-          <p:cNvSpPr txBox="1"/>
-          <p:nvPr/>
-        </p:nvSpPr>
-        <p:spPr>
-          <a:xfrm>
-            <a:off x="7360920" y="3200400"/>
-            <a:ext cx="2011680" cy="365760"/>
-          </a:xfrm>
-          <a:prstGeom prst="rect">
-            <a:avLst/>
-          </a:prstGeom>
-          <a:noFill/>
-        </p:spPr>
-        <p:txBody>
-          <a:bodyPr wrap="square">
-            <a:spAutoFit/>
-          </a:bodyPr>
-          <a:lstStyle/>
-          <a:p>
-            <a:pPr algn="ctr">
-              <a:defRPr sz="1400" b="0">
-                <a:solidFill>
-                  <a:srgbClr val="CCCCEE"/>
-                </a:solidFill>
-                <a:latin typeface="Arial"/>
-              </a:defRPr>
-            </a:pPr>
-            <a:r>
-              <a:t>WS Events</a:t>
-            </a:r>
-          </a:p>
-        </p:txBody>
-      </p:sp>
-      <p:sp>
-        <p:nvSpPr>
-          <p:cNvPr id="11" name="TextBox 10"/>
-          <p:cNvSpPr txBox="1"/>
-          <p:nvPr/>
-        </p:nvSpPr>
-        <p:spPr>
-          <a:xfrm>
-            <a:off x="9601200" y="2286000"/>
-            <a:ext cx="2011680" cy="914400"/>
-          </a:xfrm>
-          <a:prstGeom prst="rect">
-            <a:avLst/>
-          </a:prstGeom>
-          <a:noFill/>
-        </p:spPr>
-        <p:txBody>
-          <a:bodyPr wrap="square">
-            <a:spAutoFit/>
-          </a:bodyPr>
-          <a:lstStyle/>
-          <a:p>
-            <a:pPr algn="ctr">
-              <a:defRPr sz="4800" b="1">
-                <a:solidFill>
-                  <a:srgbClr val="FFFFFF"/>
-                </a:solidFill>
-                <a:latin typeface="Arial"/>
-              </a:defRPr>
-            </a:pPr>
-            <a:r>
-              <a:t>10</a:t>
-            </a:r>
-          </a:p>
-        </p:txBody>
-      </p:sp>
-      <p:sp>
-        <p:nvSpPr>
-          <p:cNvPr id="12" name="TextBox 11"/>
-          <p:cNvSpPr txBox="1"/>
-          <p:nvPr/>
-        </p:nvSpPr>
-        <p:spPr>
-          <a:xfrm>
-            <a:off x="9601200" y="3200400"/>
-            <a:ext cx="2011680" cy="365760"/>
-          </a:xfrm>
-          <a:prstGeom prst="rect">
-            <a:avLst/>
-          </a:prstGeom>
-          <a:noFill/>
-        </p:spPr>
-        <p:txBody>
-          <a:bodyPr wrap="square">
-            <a:spAutoFit/>
-          </a:bodyPr>
-          <a:lstStyle/>
-          <a:p>
-            <a:pPr algn="ctr">
-              <a:defRPr sz="1400" b="0">
-                <a:solidFill>
-                  <a:srgbClr val="CCCCEE"/>
-                </a:solidFill>
-                <a:latin typeface="Arial"/>
-              </a:defRPr>
-            </a:pPr>
-            <a:r>
-              <a:t>UI Pages</a:t>
-            </a:r>
-          </a:p>
-        </p:txBody>
-      </p:sp>
-      <p:sp>
-        <p:nvSpPr>
-          <p:cNvPr id="13" name="Rounded Rectangle 12"/>
-          <p:cNvSpPr/>
-          <p:nvPr/>
-        </p:nvSpPr>
-        <p:spPr>
-          <a:xfrm>
-            <a:off x="640080" y="4114800"/>
-            <a:ext cx="5303520" cy="1645920"/>
-          </a:xfrm>
-          <a:prstGeom prst="roundRect">
-            <a:avLst/>
-          </a:prstGeom>
-          <a:solidFill>
-            <a:srgbClr val="FFFFFF"/>
-          </a:solidFill>
-          <a:ln>
-            <a:noFill/>
-          </a:ln>
-        </p:spPr>
-        <p:style>
-          <a:lnRef idx="1">
-            <a:schemeClr val="accent1"/>
-          </a:lnRef>
-          <a:fillRef idx="3">
-            <a:schemeClr val="accent1"/>
-          </a:fillRef>
-          <a:effectRef idx="2">
-            <a:schemeClr val="accent1"/>
-          </a:effectRef>
-          <a:fontRef idx="minor">
-            <a:schemeClr val="lt1"/>
-          </a:fontRef>
-        </p:style>
-        <p:txBody>
-          <a:bodyPr rtlCol="0" anchor="ctr" lIns="274320" tIns="182880"/>
-          <a:lstStyle/>
-          <a:p>
-            <a:pPr algn="ctr">
-              <a:defRPr sz="1800" b="1">
-                <a:solidFill>
-                  <a:srgbClr val="1E293B"/>
-                </a:solidFill>
-                <a:latin typeface="Arial"/>
-              </a:defRPr>
-            </a:pPr>
-            <a:r>
-              <a:t>Production Bundle</a:t>
-            </a:r>
-          </a:p>
-          <a:p>
-            <a:pPr>
-              <a:spcBef>
-                <a:spcPts val="800"/>
-              </a:spcBef>
-              <a:defRPr sz="1600" b="0">
-                <a:solidFill>
-                  <a:srgbClr val="64748B"/>
-                </a:solidFill>
-                <a:latin typeface="Arial"/>
-              </a:defRPr>
-            </a:pPr>
-            <a:r>
-              <a:t>JavaScript:  257 KB  (80 KB gzip)</a:t>
-            </a:r>
-          </a:p>
-          <a:p>
-            <a:pPr>
-              <a:spcBef>
-                <a:spcPts val="800"/>
-              </a:spcBef>
-              <a:defRPr sz="1600" b="0">
-                <a:solidFill>
-                  <a:srgbClr val="64748B"/>
-                </a:solidFill>
-                <a:latin typeface="Arial"/>
-              </a:defRPr>
-            </a:pPr>
-            <a:r>
-              <a:t>CSS:            28 KB  (5 KB gzip)</a:t>
-            </a:r>
-          </a:p>
-        </p:txBody>
-      </p:sp>
-      <p:sp>
-        <p:nvSpPr>
-          <p:cNvPr id="14" name="Rounded Rectangle 13"/>
-          <p:cNvSpPr/>
-          <p:nvPr/>
-        </p:nvSpPr>
-        <p:spPr>
-          <a:xfrm>
-            <a:off x="6217920" y="4114800"/>
-            <a:ext cx="5303520" cy="1645920"/>
-          </a:xfrm>
-          <a:prstGeom prst="roundRect">
-            <a:avLst/>
-          </a:prstGeom>
-          <a:solidFill>
-            <a:srgbClr val="FFFFFF"/>
-          </a:solidFill>
-          <a:ln>
-            <a:noFill/>
-          </a:ln>
-        </p:spPr>
-        <p:style>
-          <a:lnRef idx="1">
-            <a:schemeClr val="accent1"/>
-          </a:lnRef>
-          <a:fillRef idx="3">
-            <a:schemeClr val="accent1"/>
-          </a:fillRef>
-          <a:effectRef idx="2">
-            <a:schemeClr val="accent1"/>
-          </a:effectRef>
-          <a:fontRef idx="minor">
-            <a:schemeClr val="lt1"/>
-          </a:fontRef>
-        </p:style>
-        <p:txBody>
-          <a:bodyPr rtlCol="0" anchor="ctr" lIns="274320" tIns="182880"/>
-          <a:lstStyle/>
-          <a:p>
-            <a:pPr algn="ctr">
-              <a:defRPr sz="1800" b="1">
-                <a:solidFill>
-                  <a:srgbClr val="1E293B"/>
-                </a:solidFill>
-                <a:latin typeface="Arial"/>
-              </a:defRPr>
-            </a:pPr>
-            <a:r>
-              <a:t>Quality</a:t>
-            </a:r>
-          </a:p>
-          <a:p>
-            <a:pPr>
-              <a:spcBef>
-                <a:spcPts val="800"/>
-              </a:spcBef>
-              <a:defRPr sz="1600" b="0">
-                <a:solidFill>
-                  <a:srgbClr val="64748B"/>
-                </a:solidFill>
-                <a:latin typeface="Arial"/>
-              </a:defRPr>
-            </a:pPr>
-            <a:r>
-              <a:t>✅  0 build errors</a:t>
-            </a:r>
-          </a:p>
-          <a:p>
-            <a:pPr>
-              <a:spcBef>
-                <a:spcPts val="800"/>
-              </a:spcBef>
-              <a:defRPr sz="1600" b="0">
-                <a:solidFill>
-                  <a:srgbClr val="64748B"/>
-                </a:solidFill>
-                <a:latin typeface="Arial"/>
-              </a:defRPr>
-            </a:pPr>
-            <a:r>
-              <a:t>✅  79 modules bundled</a:t>
-            </a:r>
-          </a:p>
-          <a:p>
-            <a:pPr>
-              <a:spcBef>
-                <a:spcPts val="800"/>
-              </a:spcBef>
-              <a:defRPr sz="1600" b="0">
-                <a:solidFill>
-                  <a:srgbClr val="64748B"/>
-                </a:solidFill>
-                <a:latin typeface="Arial"/>
-              </a:defRPr>
-            </a:pPr>
-            <a:r>
-              <a:t>✅  Full API test pass</a:t>
-            </a:r>
-          </a:p>
-        </p:txBody>
-      </p:sp>
-      <p:sp>
-        <p:nvSpPr>
-          <p:cNvPr id="15" name="TextBox 14"/>
-          <p:cNvSpPr txBox="1"/>
-          <p:nvPr/>
-        </p:nvSpPr>
-        <p:spPr>
-          <a:xfrm>
-            <a:off x="11064240" y="6400800"/>
-            <a:ext cx="914400" cy="365760"/>
-          </a:xfrm>
-          <a:prstGeom prst="rect">
-            <a:avLst/>
-          </a:prstGeom>
-          <a:noFill/>
-        </p:spPr>
-        <p:txBody>
-          <a:bodyPr wrap="square">
-            <a:spAutoFit/>
-          </a:bodyPr>
-          <a:lstStyle/>
-          <a:p>
-            <a:pPr algn="r">
-              <a:defRPr sz="1100" b="0">
-                <a:solidFill>
-                  <a:srgbClr val="CCCCEE"/>
-                </a:solidFill>
-                <a:latin typeface="Arial"/>
-              </a:defRPr>
-            </a:pPr>
-            <a:r>
-              <a:t>8 / 9</a:t>
-            </a:r>
-          </a:p>
-        </p:txBody>
-      </p:sp>
-    </p:spTree>
-  </p:cSld>
-  <p:clrMapOvr>
-    <a:masterClrMapping/>
-  </p:clrMapOvr>
-</p:sld>
-</file>
-
-<file path=ppt/slides/slide9.xml><?xml version="1.0" encoding="utf-8"?>
-<p:sld xmlns:a="http://schemas.openxmlformats.org/drawingml/2006/main" xmlns:p="http://schemas.openxmlformats.org/presentationml/2006/main" xmlns:r="http://schemas.openxmlformats.org/officeDocument/2006/relationships">
-  <p:cSld>
-    <p:bg>
-      <p:bgPr>
-        <a:solidFill>
-          <a:srgbClr val="F8FAFC"/>
-        </a:solidFill>
-        <a:effectLst/>
-      </p:bgPr>
-    </p:bg>
-    <p:spTree>
-      <p:nvGrpSpPr>
-        <p:cNvPr id="1" name=""/>
-        <p:cNvGrpSpPr/>
-        <p:nvPr/>
-      </p:nvGrpSpPr>
-      <p:grpSpPr/>
-      <p:sp>
-        <p:nvSpPr>
-          <p:cNvPr id="2" name="TextBox 1"/>
-          <p:cNvSpPr txBox="1"/>
-          <p:nvPr/>
-        </p:nvSpPr>
-        <p:spPr>
-          <a:xfrm>
-            <a:off x="640080" y="457200"/>
-            <a:ext cx="10058400" cy="640080"/>
-          </a:xfrm>
-          <a:prstGeom prst="rect">
-            <a:avLst/>
-          </a:prstGeom>
-          <a:noFill/>
-        </p:spPr>
-        <p:txBody>
-          <a:bodyPr wrap="square">
-            <a:spAutoFit/>
-          </a:bodyPr>
-          <a:lstStyle/>
-          <a:p>
-            <a:pPr algn="l">
-              <a:defRPr sz="3600" b="1">
-                <a:solidFill>
-                  <a:srgbClr val="1E293B"/>
-                </a:solidFill>
-                <a:latin typeface="Arial"/>
-              </a:defRPr>
-            </a:pPr>
-            <a:r>
-              <a:t>Feature Checklist &amp; Links</a:t>
-            </a:r>
-          </a:p>
-        </p:txBody>
-      </p:sp>
-      <p:sp>
-        <p:nvSpPr>
-          <p:cNvPr id="3" name="TextBox 2"/>
-          <p:cNvSpPr txBox="1"/>
-          <p:nvPr/>
-        </p:nvSpPr>
-        <p:spPr>
-          <a:xfrm>
-            <a:off x="640080" y="1554480"/>
-            <a:ext cx="5029200" cy="457200"/>
-          </a:xfrm>
-          <a:prstGeom prst="rect">
-            <a:avLst/>
-          </a:prstGeom>
-          <a:noFill/>
-        </p:spPr>
-        <p:txBody>
-          <a:bodyPr wrap="square">
-            <a:spAutoFit/>
-          </a:bodyPr>
-          <a:lstStyle/>
-          <a:p>
-            <a:pPr algn="l">
-              <a:defRPr sz="2000" b="1">
-                <a:solidFill>
-                  <a:srgbClr val="16A34A"/>
-                </a:solidFill>
-                <a:latin typeface="Arial"/>
-              </a:defRPr>
-            </a:pPr>
-            <a:r>
-              <a:t>Requirements Met</a:t>
-            </a:r>
-          </a:p>
-        </p:txBody>
-      </p:sp>
-      <p:sp>
-        <p:nvSpPr>
-          <p:cNvPr id="4" name="TextBox 3"/>
-          <p:cNvSpPr txBox="1"/>
-          <p:nvPr/>
-        </p:nvSpPr>
-        <p:spPr>
-          <a:xfrm>
-            <a:off x="640080" y="2103120"/>
-            <a:ext cx="5029200" cy="3200400"/>
-          </a:xfrm>
-          <a:prstGeom prst="rect">
-            <a:avLst/>
-          </a:prstGeom>
-          <a:noFill/>
-        </p:spPr>
-        <p:txBody>
-          <a:bodyPr wrap="square">
-            <a:spAutoFit/>
-          </a:bodyPr>
-          <a:lstStyle/>
-          <a:p>
-            <a:pPr algn="l">
-              <a:defRPr sz="1500" b="0">
-                <a:solidFill>
-                  <a:srgbClr val="1E293B"/>
-                </a:solidFill>
-                <a:latin typeface="Arial"/>
-              </a:defRPr>
-            </a:pPr>
-            <a:r>
-              <a:t>✅  User registration with roles</a:t>
-            </a:r>
-          </a:p>
-          <a:p>
-            <a:pPr>
-              <a:spcBef>
-                <a:spcPts val="500"/>
-              </a:spcBef>
-              <a:defRPr sz="1500" b="0">
-                <a:solidFill>
-                  <a:srgbClr val="1E293B"/>
-                </a:solidFill>
-                <a:latin typeface="Arial"/>
-              </a:defRPr>
-            </a:pPr>
-            <a:r>
-              <a:t>✅  Quiz CRUD with categories &amp; settings</a:t>
-            </a:r>
-          </a:p>
-          <a:p>
-            <a:pPr>
-              <a:spcBef>
-                <a:spcPts val="500"/>
-              </a:spcBef>
-              <a:defRPr sz="1500" b="0">
-                <a:solidFill>
-                  <a:srgbClr val="1E293B"/>
-                </a:solidFill>
-                <a:latin typeface="Arial"/>
-              </a:defRPr>
-            </a:pPr>
-            <a:r>
-              <a:t>✅  4 question types (text/image × single/multi)</a:t>
-            </a:r>
-          </a:p>
-          <a:p>
-            <a:pPr>
-              <a:spcBef>
-                <a:spcPts val="500"/>
-              </a:spcBef>
-              <a:defRPr sz="1500" b="0">
-                <a:solidFill>
-                  <a:srgbClr val="1E293B"/>
-                </a:solidFill>
-                <a:latin typeface="Arial"/>
-              </a:defRPr>
-            </a:pPr>
-            <a:r>
-              <a:t>✅  Room code join system (6-char codes)</a:t>
-            </a:r>
-          </a:p>
-          <a:p>
-            <a:pPr>
-              <a:spcBef>
-                <a:spcPts val="500"/>
-              </a:spcBef>
-              <a:defRPr sz="1500" b="0">
-                <a:solidFill>
-                  <a:srgbClr val="1E293B"/>
-                </a:solidFill>
-                <a:latin typeface="Arial"/>
-              </a:defRPr>
-            </a:pPr>
-            <a:r>
-              <a:t>✅  Real-time sync via WebSocket</a:t>
-            </a:r>
-          </a:p>
-          <a:p>
-            <a:pPr>
-              <a:spcBef>
-                <a:spcPts val="500"/>
-              </a:spcBef>
-              <a:defRPr sz="1500" b="0">
-                <a:solidFill>
-                  <a:srgbClr val="1E293B"/>
-                </a:solidFill>
-                <a:latin typeface="Arial"/>
-              </a:defRPr>
-            </a:pPr>
-            <a:r>
-              <a:t>✅  Countdown timer (server-enforced)</a:t>
-            </a:r>
-          </a:p>
-          <a:p>
-            <a:pPr>
-              <a:spcBef>
-                <a:spcPts val="500"/>
-              </a:spcBef>
-              <a:defRPr sz="1500" b="0">
-                <a:solidFill>
-                  <a:srgbClr val="1E293B"/>
-                </a:solidFill>
-                <a:latin typeface="Arial"/>
-              </a:defRPr>
-            </a:pPr>
-            <a:r>
-              <a:t>✅  Auto-scoring &amp; live leaderboard</a:t>
-            </a:r>
-          </a:p>
-          <a:p>
-            <a:pPr>
-              <a:spcBef>
-                <a:spcPts val="500"/>
-              </a:spcBef>
-              <a:defRPr sz="1500" b="0">
-                <a:solidFill>
-                  <a:srgbClr val="1E293B"/>
-                </a:solidFill>
-                <a:latin typeface="Arial"/>
-              </a:defRPr>
-            </a:pPr>
-            <a:r>
-              <a:t>✅  Personal history &amp; statistics</a:t>
-            </a:r>
-          </a:p>
-          <a:p>
-            <a:pPr>
-              <a:spcBef>
-                <a:spcPts val="500"/>
-              </a:spcBef>
-              <a:defRPr sz="1500" b="0">
-                <a:solidFill>
-                  <a:srgbClr val="1E293B"/>
-                </a:solidFill>
-                <a:latin typeface="Arial"/>
-              </a:defRPr>
-            </a:pPr>
-            <a:r>
-              <a:t>✅  Responsive design (Tailwind CSS)</a:t>
-            </a:r>
-          </a:p>
-        </p:txBody>
-      </p:sp>
-      <p:sp>
-        <p:nvSpPr>
-          <p:cNvPr id="5" name="TextBox 4"/>
-          <p:cNvSpPr txBox="1"/>
-          <p:nvPr/>
-        </p:nvSpPr>
-        <p:spPr>
-          <a:xfrm>
-            <a:off x="6400800" y="1554480"/>
-            <a:ext cx="5029200" cy="457200"/>
-          </a:xfrm>
-          <a:prstGeom prst="rect">
-            <a:avLst/>
-          </a:prstGeom>
-          <a:noFill/>
-        </p:spPr>
-        <p:txBody>
-          <a:bodyPr wrap="square">
-            <a:spAutoFit/>
-          </a:bodyPr>
-          <a:lstStyle/>
-          <a:p>
-            <a:pPr algn="l">
-              <a:defRPr sz="2000" b="1">
-                <a:solidFill>
-                  <a:srgbClr val="3B82F6"/>
-                </a:solidFill>
-                <a:latin typeface="Arial"/>
-              </a:defRPr>
-            </a:pPr>
-            <a:r>
-              <a:t>Links</a:t>
-            </a:r>
-          </a:p>
-        </p:txBody>
-      </p:sp>
-      <p:sp>
-        <p:nvSpPr>
-          <p:cNvPr id="6" name="Rounded Rectangle 5"/>
-          <p:cNvSpPr/>
-          <p:nvPr/>
-        </p:nvSpPr>
-        <p:spPr>
-          <a:xfrm>
-            <a:off x="6400800" y="2103120"/>
-            <a:ext cx="5029200" cy="777240"/>
-          </a:xfrm>
-          <a:prstGeom prst="roundRect">
-            <a:avLst/>
-          </a:prstGeom>
-          <a:solidFill>
-            <a:srgbClr val="FFFFFF"/>
-          </a:solidFill>
-          <a:ln>
-            <a:noFill/>
-          </a:ln>
-        </p:spPr>
-        <p:style>
-          <a:lnRef idx="1">
-            <a:schemeClr val="accent1"/>
-          </a:lnRef>
-          <a:fillRef idx="3">
-            <a:schemeClr val="accent1"/>
-          </a:fillRef>
-          <a:effectRef idx="2">
-            <a:schemeClr val="accent1"/>
-          </a:effectRef>
-          <a:fontRef idx="minor">
-            <a:schemeClr val="lt1"/>
-          </a:fontRef>
-        </p:style>
-        <p:txBody>
-          <a:bodyPr rtlCol="0" anchor="ctr" lIns="228600" tIns="91440"/>
-          <a:lstStyle/>
-          <a:p>
-            <a:pPr algn="ctr">
-              <a:defRPr sz="1600" b="1">
-                <a:solidFill>
-                  <a:srgbClr val="1E293B"/>
-                </a:solidFill>
-                <a:latin typeface="Arial"/>
-              </a:defRPr>
-            </a:pPr>
-            <a:r>
-              <a:t>📂  Repository</a:t>
-            </a:r>
-          </a:p>
-          <a:p>
-            <a:pPr>
-              <a:spcBef>
-                <a:spcPts val="400"/>
-              </a:spcBef>
-              <a:defRPr sz="1200" b="0">
-                <a:solidFill>
-                  <a:srgbClr val="64748B"/>
-                </a:solidFill>
-                <a:latin typeface="Arial"/>
-              </a:defRPr>
-            </a:pPr>
-            <a:r>
-              <a:t>[GitHub URL]</a:t>
-            </a:r>
-          </a:p>
-        </p:txBody>
-      </p:sp>
-      <p:sp>
-        <p:nvSpPr>
-          <p:cNvPr id="7" name="Rounded Rectangle 6"/>
-          <p:cNvSpPr/>
-          <p:nvPr/>
-        </p:nvSpPr>
-        <p:spPr>
-          <a:xfrm>
-            <a:off x="6400800" y="3017520"/>
-            <a:ext cx="5029200" cy="777240"/>
-          </a:xfrm>
-          <a:prstGeom prst="roundRect">
-            <a:avLst/>
-          </a:prstGeom>
-          <a:solidFill>
-            <a:srgbClr val="FFFFFF"/>
-          </a:solidFill>
-          <a:ln>
-            <a:noFill/>
-          </a:ln>
-        </p:spPr>
-        <p:style>
-          <a:lnRef idx="1">
-            <a:schemeClr val="accent1"/>
-          </a:lnRef>
-          <a:fillRef idx="3">
-            <a:schemeClr val="accent1"/>
-          </a:fillRef>
-          <a:effectRef idx="2">
-            <a:schemeClr val="accent1"/>
-          </a:effectRef>
-          <a:fontRef idx="minor">
-            <a:schemeClr val="lt1"/>
-          </a:fontRef>
-        </p:style>
-        <p:txBody>
-          <a:bodyPr rtlCol="0" anchor="ctr" lIns="228600" tIns="91440"/>
-          <a:lstStyle/>
-          <a:p>
-            <a:pPr algn="ctr">
-              <a:defRPr sz="1600" b="1">
-                <a:solidFill>
-                  <a:srgbClr val="1E293B"/>
-                </a:solidFill>
-                <a:latin typeface="Arial"/>
-              </a:defRPr>
-            </a:pPr>
-            <a:r>
-              <a:t>📋  Specification</a:t>
-            </a:r>
-          </a:p>
-          <a:p>
-            <a:pPr>
-              <a:spcBef>
-                <a:spcPts val="400"/>
-              </a:spcBef>
-              <a:defRPr sz="1200" b="0">
-                <a:solidFill>
-                  <a:srgbClr val="64748B"/>
-                </a:solidFill>
-                <a:latin typeface="Arial"/>
-              </a:defRPr>
-            </a:pPr>
-            <a:r>
-              <a:t>spec.md in repository root</a:t>
-            </a:r>
-          </a:p>
-        </p:txBody>
-      </p:sp>
-      <p:sp>
-        <p:nvSpPr>
-          <p:cNvPr id="8" name="Rounded Rectangle 7"/>
-          <p:cNvSpPr/>
-          <p:nvPr/>
-        </p:nvSpPr>
-        <p:spPr>
-          <a:xfrm>
-            <a:off x="6400800" y="3931920"/>
-            <a:ext cx="5029200" cy="777240"/>
-          </a:xfrm>
-          <a:prstGeom prst="roundRect">
-            <a:avLst/>
-          </a:prstGeom>
-          <a:solidFill>
-            <a:srgbClr val="FFFFFF"/>
-          </a:solidFill>
-          <a:ln>
-            <a:noFill/>
-          </a:ln>
-        </p:spPr>
-        <p:style>
-          <a:lnRef idx="1">
-            <a:schemeClr val="accent1"/>
-          </a:lnRef>
-          <a:fillRef idx="3">
-            <a:schemeClr val="accent1"/>
-          </a:fillRef>
-          <a:effectRef idx="2">
-            <a:schemeClr val="accent1"/>
-          </a:effectRef>
-          <a:fontRef idx="minor">
-            <a:schemeClr val="lt1"/>
-          </a:fontRef>
-        </p:style>
-        <p:txBody>
-          <a:bodyPr rtlCol="0" anchor="ctr" lIns="228600" tIns="91440"/>
-          <a:lstStyle/>
-          <a:p>
-            <a:pPr algn="ctr">
-              <a:defRPr sz="1600" b="1">
-                <a:solidFill>
-                  <a:srgbClr val="1E293B"/>
-                </a:solidFill>
-                <a:latin typeface="Arial"/>
-              </a:defRPr>
-            </a:pPr>
-            <a:r>
-              <a:t>🎨  Mockups</a:t>
-            </a:r>
-          </a:p>
-          <a:p>
-            <a:pPr>
-              <a:spcBef>
-                <a:spcPts val="400"/>
-              </a:spcBef>
-              <a:defRPr sz="1200" b="0">
-                <a:solidFill>
-                  <a:srgbClr val="64748B"/>
-                </a:solidFill>
-                <a:latin typeface="Arial"/>
-              </a:defRPr>
-            </a:pPr>
-            <a:r>
-              <a:t>[Figma / Miro link]</a:t>
-            </a:r>
-          </a:p>
-        </p:txBody>
-      </p:sp>
-      <p:sp>
-        <p:nvSpPr>
-          <p:cNvPr id="9" name="Rounded Rectangle 8"/>
-          <p:cNvSpPr/>
-          <p:nvPr/>
-        </p:nvSpPr>
-        <p:spPr>
-          <a:xfrm>
-            <a:off x="6400800" y="4846320"/>
-            <a:ext cx="5029200" cy="777240"/>
-          </a:xfrm>
-          <a:prstGeom prst="roundRect">
-            <a:avLst/>
-          </a:prstGeom>
-          <a:solidFill>
-            <a:srgbClr val="FFFFFF"/>
-          </a:solidFill>
-          <a:ln>
-            <a:noFill/>
-          </a:ln>
-        </p:spPr>
-        <p:style>
-          <a:lnRef idx="1">
-            <a:schemeClr val="accent1"/>
-          </a:lnRef>
-          <a:fillRef idx="3">
-            <a:schemeClr val="accent1"/>
-          </a:fillRef>
-          <a:effectRef idx="2">
-            <a:schemeClr val="accent1"/>
-          </a:effectRef>
-          <a:fontRef idx="minor">
-            <a:schemeClr val="lt1"/>
-          </a:fontRef>
-        </p:style>
-        <p:txBody>
-          <a:bodyPr rtlCol="0" anchor="ctr" lIns="228600" tIns="91440"/>
-          <a:lstStyle/>
-          <a:p>
-            <a:pPr algn="ctr">
-              <a:defRPr sz="1600" b="1">
-                <a:solidFill>
-                  <a:srgbClr val="1E293B"/>
-                </a:solidFill>
-                <a:latin typeface="Arial"/>
-              </a:defRPr>
-            </a:pPr>
-            <a:r>
-              <a:t>🚀  Live Demo</a:t>
-            </a:r>
-          </a:p>
-          <a:p>
-            <a:pPr>
-              <a:spcBef>
-                <a:spcPts val="400"/>
-              </a:spcBef>
-              <a:defRPr sz="1200" b="0">
-                <a:solidFill>
-                  <a:srgbClr val="64748B"/>
-                </a:solidFill>
-                <a:latin typeface="Arial"/>
-              </a:defRPr>
-            </a:pPr>
-            <a:r>
-              <a:t>[Deployment URL]</a:t>
-            </a:r>
-          </a:p>
-        </p:txBody>
-      </p:sp>
-      <p:sp>
-        <p:nvSpPr>
-          <p:cNvPr id="10" name="TextBox 9"/>
-          <p:cNvSpPr txBox="1"/>
-          <p:nvPr/>
-        </p:nvSpPr>
-        <p:spPr>
-          <a:xfrm>
-            <a:off x="640080" y="5943600"/>
-            <a:ext cx="10881360" cy="548640"/>
-          </a:xfrm>
-          <a:prstGeom prst="rect">
-            <a:avLst/>
-          </a:prstGeom>
-          <a:noFill/>
-        </p:spPr>
-        <p:txBody>
-          <a:bodyPr wrap="square">
-            <a:spAutoFit/>
-          </a:bodyPr>
-          <a:lstStyle/>
-          <a:p>
-            <a:pPr algn="ctr">
-              <a:defRPr sz="1800" b="1">
-                <a:solidFill>
-                  <a:srgbClr val="3B82F6"/>
-                </a:solidFill>
-                <a:latin typeface="Arial"/>
-              </a:defRPr>
-            </a:pPr>
-            <a:r>
-              <a:t>🎯  Ready to run: npm run dev  —  Server :3000, Client :5173</a:t>
-            </a:r>
-          </a:p>
-        </p:txBody>
-      </p:sp>
-      <p:sp>
-        <p:nvSpPr>
-          <p:cNvPr id="11" name="TextBox 10"/>
-          <p:cNvSpPr txBox="1"/>
-          <p:nvPr/>
-        </p:nvSpPr>
-        <p:spPr>
-          <a:xfrm>
-            <a:off x="11064240" y="6400800"/>
-            <a:ext cx="914400" cy="365760"/>
-          </a:xfrm>
-          <a:prstGeom prst="rect">
-            <a:avLst/>
-          </a:prstGeom>
-          <a:noFill/>
-        </p:spPr>
-        <p:txBody>
-          <a:bodyPr wrap="square">
-            <a:spAutoFit/>
-          </a:bodyPr>
-          <a:lstStyle/>
-          <a:p>
-            <a:pPr algn="r">
-              <a:defRPr sz="1100" b="0">
-                <a:solidFill>
-                  <a:srgbClr val="64748B"/>
-                </a:solidFill>
-                <a:latin typeface="Arial"/>
-              </a:defRPr>
-            </a:pPr>
-            <a:r>
-              <a:t>9 / 9</a:t>
             </a:r>
           </a:p>
         </p:txBody>
